--- a/sem_3_file_system/presentations/caos_3.pptx
+++ b/sem_3_file_system/presentations/caos_3.pptx
@@ -272,7 +272,7 @@
           <a:p>
             <a:fld id="{1D8BD707-D9CF-40AE-B4C6-C98DA3205C09}" type="datetimeFigureOut">
               <a:rPr lang="en-US"/>
-              <a:t>9/27/2024</a:t>
+              <a:t>9/23/2025</a:t>
             </a:fld>
             <a:endParaRPr lang="en-US"/>
           </a:p>
@@ -449,7 +449,7 @@
           <a:p>
             <a:fld id="{1D8BD707-D9CF-40AE-B4C6-C98DA3205C09}" type="datetimeFigureOut">
               <a:rPr lang="en-US"/>
-              <a:t>9/27/2024</a:t>
+              <a:t>9/23/2025</a:t>
             </a:fld>
             <a:endParaRPr lang="en-US"/>
           </a:p>
@@ -663,7 +663,7 @@
           <a:p>
             <a:fld id="{1D8BD707-D9CF-40AE-B4C6-C98DA3205C09}" type="datetimeFigureOut">
               <a:rPr lang="en-US"/>
-              <a:t>9/27/2024</a:t>
+              <a:t>9/23/2025</a:t>
             </a:fld>
             <a:endParaRPr lang="en-US"/>
           </a:p>
@@ -841,7 +841,7 @@
           <a:p>
             <a:fld id="{1D8BD707-D9CF-40AE-B4C6-C98DA3205C09}" type="datetimeFigureOut">
               <a:rPr lang="en-US"/>
-              <a:t>9/27/2024</a:t>
+              <a:t>9/23/2025</a:t>
             </a:fld>
             <a:endParaRPr lang="en-US"/>
           </a:p>
@@ -960,7 +960,7 @@
           <a:p>
             <a:fld id="{1D8BD707-D9CF-40AE-B4C6-C98DA3205C09}" type="datetimeFigureOut">
               <a:rPr lang="en-US"/>
-              <a:t>9/27/2024</a:t>
+              <a:t>9/23/2025</a:t>
             </a:fld>
             <a:endParaRPr lang="en-US"/>
           </a:p>
@@ -1185,7 +1185,7 @@
           <a:p>
             <a:fld id="{1D8BD707-D9CF-40AE-B4C6-C98DA3205C09}" type="datetimeFigureOut">
               <a:rPr lang="en-US"/>
-              <a:t>9/27/2024</a:t>
+              <a:t>9/23/2025</a:t>
             </a:fld>
             <a:endParaRPr lang="en-US"/>
           </a:p>
@@ -1406,6 +1406,53 @@
       </p:grpSpPr>
       <p:sp>
         <p:nvSpPr>
+          <p:cNvPr id="4" name="Rectangle 3">
+            <a:extLst>
+              <a:ext uri="{FF2B5EF4-FFF2-40B4-BE49-F238E27FC236}">
+                <a16:creationId xmlns:a16="http://schemas.microsoft.com/office/drawing/2014/main" id="{20D4672C-407F-469D-980A-8B9496A6D1B9}"/>
+              </a:ext>
+            </a:extLst>
+          </p:cNvPr>
+          <p:cNvSpPr/>
+          <p:nvPr/>
+        </p:nvSpPr>
+        <p:spPr>
+          <a:xfrm>
+            <a:off x="8008619" y="4328735"/>
+            <a:ext cx="4177031" cy="1432643"/>
+          </a:xfrm>
+          <a:prstGeom prst="rect">
+            <a:avLst/>
+          </a:prstGeom>
+          <a:ln>
+            <a:noFill/>
+          </a:ln>
+        </p:spPr>
+        <p:style>
+          <a:lnRef idx="2">
+            <a:schemeClr val="accent6"/>
+          </a:lnRef>
+          <a:fillRef idx="1">
+            <a:schemeClr val="lt1"/>
+          </a:fillRef>
+          <a:effectRef idx="0">
+            <a:schemeClr val="accent6"/>
+          </a:effectRef>
+          <a:fontRef idx="minor">
+            <a:schemeClr val="dk1"/>
+          </a:fontRef>
+        </p:style>
+        <p:txBody>
+          <a:bodyPr rtlCol="0" anchor="ctr"/>
+          <a:lstStyle/>
+          <a:p>
+            <a:pPr algn="ctr"/>
+            <a:endParaRPr lang="ru-RU"/>
+          </a:p>
+        </p:txBody>
+      </p:sp>
+      <p:sp>
+        <p:nvSpPr>
           <p:cNvPr id="2" name="object 2"/>
           <p:cNvSpPr txBox="1">
             <a:spLocks noGrp="1"/>
@@ -1472,6 +1519,41 @@
               <a:t>система</a:t>
             </a:r>
             <a:endParaRPr sz="5250" dirty="0"/>
+          </a:p>
+        </p:txBody>
+      </p:sp>
+      <p:sp>
+        <p:nvSpPr>
+          <p:cNvPr id="3" name="TextBox 2">
+            <a:extLst>
+              <a:ext uri="{FF2B5EF4-FFF2-40B4-BE49-F238E27FC236}">
+                <a16:creationId xmlns:a16="http://schemas.microsoft.com/office/drawing/2014/main" id="{41B5A81A-5F7C-4A7A-BFDF-FB8886084CF7}"/>
+              </a:ext>
+            </a:extLst>
+          </p:cNvPr>
+          <p:cNvSpPr txBox="1"/>
+          <p:nvPr/>
+        </p:nvSpPr>
+        <p:spPr>
+          <a:xfrm>
+            <a:off x="8427718" y="3825875"/>
+            <a:ext cx="3338831" cy="1569660"/>
+          </a:xfrm>
+          <a:prstGeom prst="rect">
+            <a:avLst/>
+          </a:prstGeom>
+          <a:noFill/>
+        </p:spPr>
+        <p:txBody>
+          <a:bodyPr wrap="square" rtlCol="0">
+            <a:spAutoFit/>
+          </a:bodyPr>
+          <a:lstStyle/>
+          <a:p>
+            <a:r>
+              <a:rPr lang="ru-RU" sz="9600" b="1" dirty="0"/>
+              <a:t>АКОС</a:t>
+            </a:r>
           </a:p>
         </p:txBody>
       </p:sp>
@@ -3860,7 +3942,7 @@
         <p:spPr>
           <a:xfrm>
             <a:off x="1076272" y="3531203"/>
-            <a:ext cx="16972280" cy="2814955"/>
+            <a:ext cx="16972280" cy="3033523"/>
           </a:xfrm>
           <a:prstGeom prst="rect">
             <a:avLst/>
@@ -3881,38 +3963,38 @@
               </a:spcBef>
             </a:pPr>
             <a:r>
-              <a:rPr sz="2600" b="1" spc="25" dirty="0">
+              <a:rPr sz="2800" b="1" spc="25" dirty="0">
                 <a:solidFill>
                   <a:srgbClr val="017100"/>
                 </a:solidFill>
-                <a:latin typeface="Courier New"/>
-                <a:cs typeface="Courier New"/>
+                <a:latin typeface="Arial" panose="020B0604020202020204" pitchFamily="34" charset="0"/>
+                <a:cs typeface="Arial" panose="020B0604020202020204" pitchFamily="34" charset="0"/>
               </a:rPr>
               <a:t>#include</a:t>
             </a:r>
             <a:r>
-              <a:rPr sz="2600" b="1" spc="-10" dirty="0">
+              <a:rPr sz="2800" b="1" spc="-10" dirty="0">
                 <a:solidFill>
                   <a:srgbClr val="017100"/>
                 </a:solidFill>
-                <a:latin typeface="Courier New"/>
-                <a:cs typeface="Courier New"/>
-              </a:rPr>
-              <a:t> </a:t>
-            </a:r>
-            <a:r>
-              <a:rPr sz="2600" b="1" spc="25" dirty="0">
+                <a:latin typeface="Arial" panose="020B0604020202020204" pitchFamily="34" charset="0"/>
+                <a:cs typeface="Arial" panose="020B0604020202020204" pitchFamily="34" charset="0"/>
+              </a:rPr>
+              <a:t> </a:t>
+            </a:r>
+            <a:r>
+              <a:rPr sz="2800" b="1" spc="25" dirty="0">
                 <a:solidFill>
                   <a:srgbClr val="017100"/>
                 </a:solidFill>
-                <a:latin typeface="Courier New"/>
-                <a:cs typeface="Courier New"/>
+                <a:latin typeface="Arial" panose="020B0604020202020204" pitchFamily="34" charset="0"/>
+                <a:cs typeface="Arial" panose="020B0604020202020204" pitchFamily="34" charset="0"/>
               </a:rPr>
               <a:t>&lt;time.h&gt;</a:t>
             </a:r>
-            <a:endParaRPr sz="2600" dirty="0">
-              <a:latin typeface="Courier New"/>
-              <a:cs typeface="Courier New"/>
+            <a:endParaRPr sz="2800" dirty="0">
+              <a:latin typeface="Arial" panose="020B0604020202020204" pitchFamily="34" charset="0"/>
+              <a:cs typeface="Arial" panose="020B0604020202020204" pitchFamily="34" charset="0"/>
             </a:endParaRPr>
           </a:p>
           <a:p>
@@ -3924,9 +4006,9 @@
                 <a:spcPts val="30"/>
               </a:spcBef>
             </a:pPr>
-            <a:endParaRPr sz="2750" dirty="0">
-              <a:latin typeface="Courier New"/>
-              <a:cs typeface="Courier New"/>
+            <a:endParaRPr sz="2800" dirty="0">
+              <a:latin typeface="Arial" panose="020B0604020202020204" pitchFamily="34" charset="0"/>
+              <a:cs typeface="Arial" panose="020B0604020202020204" pitchFamily="34" charset="0"/>
             </a:endParaRPr>
           </a:p>
           <a:p>
@@ -3939,62 +4021,62 @@
               </a:spcBef>
             </a:pPr>
             <a:r>
-              <a:rPr sz="2600" b="1" spc="25" dirty="0">
-                <a:latin typeface="Courier New"/>
-                <a:cs typeface="Courier New"/>
+              <a:rPr sz="2800" b="1" spc="25" dirty="0">
+                <a:latin typeface="Arial" panose="020B0604020202020204" pitchFamily="34" charset="0"/>
+                <a:cs typeface="Arial" panose="020B0604020202020204" pitchFamily="34" charset="0"/>
               </a:rPr>
               <a:t>time_t</a:t>
             </a:r>
             <a:r>
-              <a:rPr sz="2600" b="1" spc="10" dirty="0">
-                <a:latin typeface="Courier New"/>
-                <a:cs typeface="Courier New"/>
-              </a:rPr>
-              <a:t> </a:t>
-            </a:r>
-            <a:r>
-              <a:rPr sz="2600" b="1" spc="25" dirty="0">
-                <a:latin typeface="Courier New"/>
-                <a:cs typeface="Courier New"/>
+              <a:rPr sz="2800" b="1" spc="10" dirty="0">
+                <a:latin typeface="Arial" panose="020B0604020202020204" pitchFamily="34" charset="0"/>
+                <a:cs typeface="Arial" panose="020B0604020202020204" pitchFamily="34" charset="0"/>
+              </a:rPr>
+              <a:t> </a:t>
+            </a:r>
+            <a:r>
+              <a:rPr sz="2800" b="1" spc="25" dirty="0">
+                <a:latin typeface="Arial" panose="020B0604020202020204" pitchFamily="34" charset="0"/>
+                <a:cs typeface="Arial" panose="020B0604020202020204" pitchFamily="34" charset="0"/>
               </a:rPr>
               <a:t>time(time_t</a:t>
             </a:r>
             <a:r>
-              <a:rPr sz="2600" b="1" spc="15" dirty="0">
-                <a:latin typeface="Courier New"/>
-                <a:cs typeface="Courier New"/>
-              </a:rPr>
-              <a:t> </a:t>
-            </a:r>
-            <a:r>
-              <a:rPr sz="2600" b="1" spc="25" dirty="0">
-                <a:latin typeface="Courier New"/>
-                <a:cs typeface="Courier New"/>
+              <a:rPr sz="2800" b="1" spc="15" dirty="0">
+                <a:latin typeface="Arial" panose="020B0604020202020204" pitchFamily="34" charset="0"/>
+                <a:cs typeface="Arial" panose="020B0604020202020204" pitchFamily="34" charset="0"/>
+              </a:rPr>
+              <a:t> </a:t>
+            </a:r>
+            <a:r>
+              <a:rPr sz="2800" b="1" spc="25" dirty="0">
+                <a:latin typeface="Arial" panose="020B0604020202020204" pitchFamily="34" charset="0"/>
+                <a:cs typeface="Arial" panose="020B0604020202020204" pitchFamily="34" charset="0"/>
               </a:rPr>
               <a:t>*</a:t>
             </a:r>
             <a:r>
-              <a:rPr sz="2600" u="heavy" spc="25" dirty="0">
+              <a:rPr sz="2800" u="heavy" spc="25" dirty="0">
                 <a:uFill>
                   <a:solidFill>
                     <a:srgbClr val="000000"/>
                   </a:solidFill>
                 </a:uFill>
-                <a:latin typeface="Courier New"/>
-                <a:cs typeface="Courier New"/>
+                <a:latin typeface="Arial" panose="020B0604020202020204" pitchFamily="34" charset="0"/>
+                <a:cs typeface="Arial" panose="020B0604020202020204" pitchFamily="34" charset="0"/>
               </a:rPr>
               <a:t>tloc</a:t>
             </a:r>
             <a:r>
-              <a:rPr sz="2600" b="1" spc="25" dirty="0">
-                <a:latin typeface="Courier New"/>
-                <a:cs typeface="Courier New"/>
+              <a:rPr sz="2800" b="1" spc="25" dirty="0">
+                <a:latin typeface="Arial" panose="020B0604020202020204" pitchFamily="34" charset="0"/>
+                <a:cs typeface="Arial" panose="020B0604020202020204" pitchFamily="34" charset="0"/>
               </a:rPr>
               <a:t>);</a:t>
             </a:r>
-            <a:endParaRPr sz="2600" dirty="0">
-              <a:latin typeface="Courier New"/>
-              <a:cs typeface="Courier New"/>
+            <a:endParaRPr sz="2800" dirty="0">
+              <a:latin typeface="Arial" panose="020B0604020202020204" pitchFamily="34" charset="0"/>
+              <a:cs typeface="Arial" panose="020B0604020202020204" pitchFamily="34" charset="0"/>
             </a:endParaRPr>
           </a:p>
           <a:p>
@@ -4006,9 +4088,9 @@
                 <a:spcPts val="30"/>
               </a:spcBef>
             </a:pPr>
-            <a:endParaRPr sz="2750" dirty="0">
-              <a:latin typeface="Courier New"/>
-              <a:cs typeface="Courier New"/>
+            <a:endParaRPr sz="2800" dirty="0">
+              <a:latin typeface="Arial" panose="020B0604020202020204" pitchFamily="34" charset="0"/>
+              <a:cs typeface="Arial" panose="020B0604020202020204" pitchFamily="34" charset="0"/>
             </a:endParaRPr>
           </a:p>
           <a:p>
@@ -4018,141 +4100,141 @@
               </a:lnSpc>
             </a:pPr>
             <a:r>
-              <a:rPr sz="2600" spc="25" dirty="0">
-                <a:latin typeface="Courier New"/>
-                <a:cs typeface="Courier New"/>
+              <a:rPr sz="2800" spc="25" dirty="0">
+                <a:latin typeface="Arial" panose="020B0604020202020204" pitchFamily="34" charset="0"/>
+                <a:cs typeface="Arial" panose="020B0604020202020204" pitchFamily="34" charset="0"/>
               </a:rPr>
               <a:t>Возвращает</a:t>
             </a:r>
             <a:r>
-              <a:rPr sz="2600" spc="35" dirty="0">
-                <a:latin typeface="Courier New"/>
-                <a:cs typeface="Courier New"/>
-              </a:rPr>
-              <a:t> </a:t>
-            </a:r>
-            <a:r>
-              <a:rPr sz="2600" spc="25" dirty="0">
-                <a:latin typeface="Courier New"/>
-                <a:cs typeface="Courier New"/>
+              <a:rPr sz="2800" spc="35" dirty="0">
+                <a:latin typeface="Arial" panose="020B0604020202020204" pitchFamily="34" charset="0"/>
+                <a:cs typeface="Arial" panose="020B0604020202020204" pitchFamily="34" charset="0"/>
+              </a:rPr>
+              <a:t> </a:t>
+            </a:r>
+            <a:r>
+              <a:rPr sz="2800" spc="25" dirty="0">
+                <a:latin typeface="Arial" panose="020B0604020202020204" pitchFamily="34" charset="0"/>
+                <a:cs typeface="Arial" panose="020B0604020202020204" pitchFamily="34" charset="0"/>
               </a:rPr>
               <a:t>количество</a:t>
             </a:r>
             <a:r>
-              <a:rPr sz="2600" spc="35" dirty="0">
-                <a:latin typeface="Courier New"/>
-                <a:cs typeface="Courier New"/>
-              </a:rPr>
-              <a:t> </a:t>
-            </a:r>
-            <a:r>
-              <a:rPr sz="2600" spc="25" dirty="0">
-                <a:latin typeface="Courier New"/>
-                <a:cs typeface="Courier New"/>
+              <a:rPr sz="2800" spc="35" dirty="0">
+                <a:latin typeface="Arial" panose="020B0604020202020204" pitchFamily="34" charset="0"/>
+                <a:cs typeface="Arial" panose="020B0604020202020204" pitchFamily="34" charset="0"/>
+              </a:rPr>
+              <a:t> </a:t>
+            </a:r>
+            <a:r>
+              <a:rPr sz="2800" spc="25" dirty="0">
+                <a:latin typeface="Arial" panose="020B0604020202020204" pitchFamily="34" charset="0"/>
+                <a:cs typeface="Arial" panose="020B0604020202020204" pitchFamily="34" charset="0"/>
               </a:rPr>
               <a:t>секунд</a:t>
             </a:r>
             <a:r>
-              <a:rPr sz="2600" spc="40" dirty="0">
-                <a:latin typeface="Courier New"/>
-                <a:cs typeface="Courier New"/>
-              </a:rPr>
-              <a:t> </a:t>
-            </a:r>
-            <a:r>
-              <a:rPr sz="2600" spc="25" dirty="0">
-                <a:latin typeface="Courier New"/>
-                <a:cs typeface="Courier New"/>
+              <a:rPr sz="2800" spc="40" dirty="0">
+                <a:latin typeface="Arial" panose="020B0604020202020204" pitchFamily="34" charset="0"/>
+                <a:cs typeface="Arial" panose="020B0604020202020204" pitchFamily="34" charset="0"/>
+              </a:rPr>
+              <a:t> </a:t>
+            </a:r>
+            <a:r>
+              <a:rPr sz="2800" spc="25" dirty="0">
+                <a:latin typeface="Arial" panose="020B0604020202020204" pitchFamily="34" charset="0"/>
+                <a:cs typeface="Arial" panose="020B0604020202020204" pitchFamily="34" charset="0"/>
               </a:rPr>
               <a:t>с</a:t>
             </a:r>
             <a:r>
-              <a:rPr sz="2600" spc="35" dirty="0">
-                <a:latin typeface="Courier New"/>
-                <a:cs typeface="Courier New"/>
-              </a:rPr>
-              <a:t> </a:t>
-            </a:r>
-            <a:r>
-              <a:rPr sz="2600" spc="25" dirty="0">
-                <a:latin typeface="Courier New"/>
-                <a:cs typeface="Courier New"/>
+              <a:rPr sz="2800" spc="35" dirty="0">
+                <a:latin typeface="Arial" panose="020B0604020202020204" pitchFamily="34" charset="0"/>
+                <a:cs typeface="Arial" panose="020B0604020202020204" pitchFamily="34" charset="0"/>
+              </a:rPr>
+              <a:t> </a:t>
+            </a:r>
+            <a:r>
+              <a:rPr sz="2800" spc="25" dirty="0">
+                <a:latin typeface="Arial" panose="020B0604020202020204" pitchFamily="34" charset="0"/>
+                <a:cs typeface="Arial" panose="020B0604020202020204" pitchFamily="34" charset="0"/>
               </a:rPr>
               <a:t>начала</a:t>
             </a:r>
             <a:r>
-              <a:rPr sz="2600" spc="35" dirty="0">
-                <a:latin typeface="Courier New"/>
-                <a:cs typeface="Courier New"/>
-              </a:rPr>
-              <a:t> </a:t>
-            </a:r>
-            <a:r>
-              <a:rPr sz="2600" b="1" spc="25" dirty="0">
-                <a:latin typeface="Courier New"/>
-                <a:cs typeface="Courier New"/>
+              <a:rPr sz="2800" spc="35" dirty="0">
+                <a:latin typeface="Arial" panose="020B0604020202020204" pitchFamily="34" charset="0"/>
+                <a:cs typeface="Arial" panose="020B0604020202020204" pitchFamily="34" charset="0"/>
+              </a:rPr>
+              <a:t> </a:t>
+            </a:r>
+            <a:r>
+              <a:rPr sz="2800" b="1" spc="25" dirty="0">
+                <a:latin typeface="Arial" panose="020B0604020202020204" pitchFamily="34" charset="0"/>
+                <a:cs typeface="Arial" panose="020B0604020202020204" pitchFamily="34" charset="0"/>
               </a:rPr>
               <a:t>Epoch</a:t>
             </a:r>
             <a:r>
-              <a:rPr sz="2600" spc="25" dirty="0">
-                <a:latin typeface="Courier New"/>
-                <a:cs typeface="Courier New"/>
+              <a:rPr sz="2800" spc="25" dirty="0">
+                <a:latin typeface="Arial" panose="020B0604020202020204" pitchFamily="34" charset="0"/>
+                <a:cs typeface="Arial" panose="020B0604020202020204" pitchFamily="34" charset="0"/>
               </a:rPr>
               <a:t>:</a:t>
             </a:r>
             <a:r>
-              <a:rPr sz="2600" spc="35" dirty="0">
-                <a:latin typeface="Courier New"/>
-                <a:cs typeface="Courier New"/>
-              </a:rPr>
-              <a:t> </a:t>
-            </a:r>
-            <a:r>
-              <a:rPr sz="2600" b="1" spc="25" dirty="0">
-                <a:latin typeface="Courier New"/>
-                <a:cs typeface="Courier New"/>
+              <a:rPr sz="2800" spc="35" dirty="0">
+                <a:latin typeface="Arial" panose="020B0604020202020204" pitchFamily="34" charset="0"/>
+                <a:cs typeface="Arial" panose="020B0604020202020204" pitchFamily="34" charset="0"/>
+              </a:rPr>
+              <a:t> </a:t>
+            </a:r>
+            <a:r>
+              <a:rPr sz="2800" b="1" spc="25" dirty="0">
+                <a:latin typeface="Arial" panose="020B0604020202020204" pitchFamily="34" charset="0"/>
+                <a:cs typeface="Arial" panose="020B0604020202020204" pitchFamily="34" charset="0"/>
               </a:rPr>
               <a:t>1970-01-01</a:t>
             </a:r>
             <a:r>
-              <a:rPr sz="2600" b="1" spc="40" dirty="0">
-                <a:latin typeface="Courier New"/>
-                <a:cs typeface="Courier New"/>
-              </a:rPr>
-              <a:t> </a:t>
-            </a:r>
-            <a:r>
-              <a:rPr sz="2600" b="1" spc="25" dirty="0">
-                <a:latin typeface="Courier New"/>
-                <a:cs typeface="Courier New"/>
+              <a:rPr sz="2800" b="1" spc="40" dirty="0">
+                <a:latin typeface="Arial" panose="020B0604020202020204" pitchFamily="34" charset="0"/>
+                <a:cs typeface="Arial" panose="020B0604020202020204" pitchFamily="34" charset="0"/>
+              </a:rPr>
+              <a:t> </a:t>
+            </a:r>
+            <a:r>
+              <a:rPr sz="2800" b="1" spc="25" dirty="0">
+                <a:latin typeface="Arial" panose="020B0604020202020204" pitchFamily="34" charset="0"/>
+                <a:cs typeface="Arial" panose="020B0604020202020204" pitchFamily="34" charset="0"/>
               </a:rPr>
               <a:t>00:00:00</a:t>
             </a:r>
             <a:r>
-              <a:rPr sz="2600" b="1" spc="35" dirty="0">
-                <a:latin typeface="Courier New"/>
-                <a:cs typeface="Courier New"/>
-              </a:rPr>
-              <a:t> </a:t>
-            </a:r>
-            <a:r>
-              <a:rPr sz="2600" b="1" spc="25" dirty="0">
-                <a:latin typeface="Courier New"/>
-                <a:cs typeface="Courier New"/>
+              <a:rPr sz="2800" b="1" spc="35" dirty="0">
+                <a:latin typeface="Arial" panose="020B0604020202020204" pitchFamily="34" charset="0"/>
+                <a:cs typeface="Arial" panose="020B0604020202020204" pitchFamily="34" charset="0"/>
+              </a:rPr>
+              <a:t> </a:t>
+            </a:r>
+            <a:r>
+              <a:rPr sz="2800" b="1" spc="25" dirty="0">
+                <a:latin typeface="Arial" panose="020B0604020202020204" pitchFamily="34" charset="0"/>
+                <a:cs typeface="Arial" panose="020B0604020202020204" pitchFamily="34" charset="0"/>
               </a:rPr>
               <a:t>+0000(UTC)</a:t>
             </a:r>
             <a:r>
-              <a:rPr sz="2600" spc="25" dirty="0">
-                <a:latin typeface="Courier New"/>
-                <a:cs typeface="Courier New"/>
+              <a:rPr sz="2800" spc="25" dirty="0">
+                <a:latin typeface="Arial" panose="020B0604020202020204" pitchFamily="34" charset="0"/>
+                <a:cs typeface="Arial" panose="020B0604020202020204" pitchFamily="34" charset="0"/>
               </a:rPr>
               <a:t>.</a:t>
             </a:r>
-            <a:endParaRPr sz="2600" dirty="0">
-              <a:latin typeface="Courier New"/>
-              <a:cs typeface="Courier New"/>
+            <a:endParaRPr sz="2800" dirty="0">
+              <a:latin typeface="Arial" panose="020B0604020202020204" pitchFamily="34" charset="0"/>
+              <a:cs typeface="Arial" panose="020B0604020202020204" pitchFamily="34" charset="0"/>
             </a:endParaRPr>
           </a:p>
           <a:p>
@@ -4165,225 +4247,225 @@
               </a:spcBef>
             </a:pPr>
             <a:r>
-              <a:rPr sz="2600" spc="25" dirty="0">
-                <a:latin typeface="Courier New"/>
-                <a:cs typeface="Courier New"/>
+              <a:rPr sz="2800" spc="25" dirty="0">
+                <a:latin typeface="Arial" panose="020B0604020202020204" pitchFamily="34" charset="0"/>
+                <a:cs typeface="Arial" panose="020B0604020202020204" pitchFamily="34" charset="0"/>
               </a:rPr>
               <a:t>Если</a:t>
             </a:r>
             <a:r>
-              <a:rPr sz="2600" spc="30" dirty="0">
-                <a:latin typeface="Courier New"/>
-                <a:cs typeface="Courier New"/>
-              </a:rPr>
-              <a:t> </a:t>
-            </a:r>
-            <a:r>
-              <a:rPr sz="2600" b="1" spc="25" dirty="0">
-                <a:latin typeface="Courier New"/>
-                <a:cs typeface="Courier New"/>
+              <a:rPr sz="2800" spc="30" dirty="0">
+                <a:latin typeface="Arial" panose="020B0604020202020204" pitchFamily="34" charset="0"/>
+                <a:cs typeface="Arial" panose="020B0604020202020204" pitchFamily="34" charset="0"/>
+              </a:rPr>
+              <a:t> </a:t>
+            </a:r>
+            <a:r>
+              <a:rPr sz="2800" b="1" spc="25" dirty="0">
+                <a:latin typeface="Arial" panose="020B0604020202020204" pitchFamily="34" charset="0"/>
+                <a:cs typeface="Arial" panose="020B0604020202020204" pitchFamily="34" charset="0"/>
               </a:rPr>
               <a:t>tloc</a:t>
             </a:r>
             <a:r>
-              <a:rPr sz="2600" b="1" spc="35" dirty="0">
-                <a:latin typeface="Courier New"/>
-                <a:cs typeface="Courier New"/>
-              </a:rPr>
-              <a:t> </a:t>
-            </a:r>
-            <a:r>
-              <a:rPr sz="2600" spc="25" dirty="0">
-                <a:latin typeface="Courier New"/>
-                <a:cs typeface="Courier New"/>
+              <a:rPr sz="2800" b="1" spc="35" dirty="0">
+                <a:latin typeface="Arial" panose="020B0604020202020204" pitchFamily="34" charset="0"/>
+                <a:cs typeface="Arial" panose="020B0604020202020204" pitchFamily="34" charset="0"/>
+              </a:rPr>
+              <a:t> </a:t>
+            </a:r>
+            <a:r>
+              <a:rPr sz="2800" spc="25" dirty="0">
+                <a:latin typeface="Arial" panose="020B0604020202020204" pitchFamily="34" charset="0"/>
+                <a:cs typeface="Arial" panose="020B0604020202020204" pitchFamily="34" charset="0"/>
               </a:rPr>
               <a:t>-</a:t>
             </a:r>
             <a:r>
-              <a:rPr sz="2600" spc="30" dirty="0">
-                <a:latin typeface="Courier New"/>
-                <a:cs typeface="Courier New"/>
-              </a:rPr>
-              <a:t> </a:t>
-            </a:r>
-            <a:r>
-              <a:rPr sz="2600" spc="25" dirty="0">
-                <a:latin typeface="Courier New"/>
-                <a:cs typeface="Courier New"/>
+              <a:rPr sz="2800" spc="30" dirty="0">
+                <a:latin typeface="Arial" panose="020B0604020202020204" pitchFamily="34" charset="0"/>
+                <a:cs typeface="Arial" panose="020B0604020202020204" pitchFamily="34" charset="0"/>
+              </a:rPr>
+              <a:t> </a:t>
+            </a:r>
+            <a:r>
+              <a:rPr sz="2800" spc="25" dirty="0">
+                <a:latin typeface="Arial" panose="020B0604020202020204" pitchFamily="34" charset="0"/>
+                <a:cs typeface="Arial" panose="020B0604020202020204" pitchFamily="34" charset="0"/>
               </a:rPr>
               <a:t>не</a:t>
             </a:r>
             <a:r>
-              <a:rPr sz="2600" spc="35" dirty="0">
-                <a:latin typeface="Courier New"/>
-                <a:cs typeface="Courier New"/>
-              </a:rPr>
-              <a:t> </a:t>
-            </a:r>
-            <a:r>
-              <a:rPr sz="2600" spc="25" dirty="0">
-                <a:latin typeface="Courier New"/>
-                <a:cs typeface="Courier New"/>
+              <a:rPr sz="2800" spc="35" dirty="0">
+                <a:latin typeface="Arial" panose="020B0604020202020204" pitchFamily="34" charset="0"/>
+                <a:cs typeface="Arial" panose="020B0604020202020204" pitchFamily="34" charset="0"/>
+              </a:rPr>
+              <a:t> </a:t>
+            </a:r>
+            <a:r>
+              <a:rPr sz="2800" spc="25" dirty="0">
+                <a:latin typeface="Arial" panose="020B0604020202020204" pitchFamily="34" charset="0"/>
+                <a:cs typeface="Arial" panose="020B0604020202020204" pitchFamily="34" charset="0"/>
               </a:rPr>
               <a:t>NULL</a:t>
             </a:r>
             <a:r>
-              <a:rPr sz="2600" spc="30" dirty="0">
-                <a:latin typeface="Courier New"/>
-                <a:cs typeface="Courier New"/>
-              </a:rPr>
-              <a:t> </a:t>
-            </a:r>
-            <a:r>
-              <a:rPr sz="2600" spc="25" dirty="0">
-                <a:latin typeface="Courier New"/>
-                <a:cs typeface="Courier New"/>
+              <a:rPr sz="2800" spc="30" dirty="0">
+                <a:latin typeface="Arial" panose="020B0604020202020204" pitchFamily="34" charset="0"/>
+                <a:cs typeface="Arial" panose="020B0604020202020204" pitchFamily="34" charset="0"/>
+              </a:rPr>
+              <a:t> </a:t>
+            </a:r>
+            <a:r>
+              <a:rPr sz="2800" spc="25" dirty="0">
+                <a:latin typeface="Arial" panose="020B0604020202020204" pitchFamily="34" charset="0"/>
+                <a:cs typeface="Arial" panose="020B0604020202020204" pitchFamily="34" charset="0"/>
               </a:rPr>
               <a:t>-</a:t>
             </a:r>
             <a:r>
-              <a:rPr sz="2600" spc="35" dirty="0">
-                <a:latin typeface="Courier New"/>
-                <a:cs typeface="Courier New"/>
-              </a:rPr>
-              <a:t> </a:t>
-            </a:r>
-            <a:r>
-              <a:rPr sz="2600" spc="25" dirty="0">
-                <a:latin typeface="Courier New"/>
-                <a:cs typeface="Courier New"/>
+              <a:rPr sz="2800" spc="35" dirty="0">
+                <a:latin typeface="Arial" panose="020B0604020202020204" pitchFamily="34" charset="0"/>
+                <a:cs typeface="Arial" panose="020B0604020202020204" pitchFamily="34" charset="0"/>
+              </a:rPr>
+              <a:t> </a:t>
+            </a:r>
+            <a:r>
+              <a:rPr sz="2800" spc="25" dirty="0">
+                <a:latin typeface="Arial" panose="020B0604020202020204" pitchFamily="34" charset="0"/>
+                <a:cs typeface="Arial" panose="020B0604020202020204" pitchFamily="34" charset="0"/>
               </a:rPr>
               <a:t>записывает</a:t>
             </a:r>
             <a:r>
-              <a:rPr sz="2600" spc="30" dirty="0">
-                <a:latin typeface="Courier New"/>
-                <a:cs typeface="Courier New"/>
-              </a:rPr>
-              <a:t> </a:t>
-            </a:r>
-            <a:r>
-              <a:rPr sz="2600" spc="25" dirty="0">
-                <a:latin typeface="Courier New"/>
-                <a:cs typeface="Courier New"/>
+              <a:rPr sz="2800" spc="30" dirty="0">
+                <a:latin typeface="Arial" panose="020B0604020202020204" pitchFamily="34" charset="0"/>
+                <a:cs typeface="Arial" panose="020B0604020202020204" pitchFamily="34" charset="0"/>
+              </a:rPr>
+              <a:t> </a:t>
+            </a:r>
+            <a:r>
+              <a:rPr sz="2800" spc="25" dirty="0">
+                <a:latin typeface="Arial" panose="020B0604020202020204" pitchFamily="34" charset="0"/>
+                <a:cs typeface="Arial" panose="020B0604020202020204" pitchFamily="34" charset="0"/>
               </a:rPr>
               <a:t>значение</a:t>
             </a:r>
             <a:r>
-              <a:rPr sz="2600" spc="35" dirty="0">
-                <a:latin typeface="Courier New"/>
-                <a:cs typeface="Courier New"/>
-              </a:rPr>
-              <a:t> </a:t>
-            </a:r>
-            <a:r>
-              <a:rPr sz="2600" spc="25" dirty="0">
-                <a:latin typeface="Courier New"/>
-                <a:cs typeface="Courier New"/>
+              <a:rPr sz="2800" spc="35" dirty="0">
+                <a:latin typeface="Arial" panose="020B0604020202020204" pitchFamily="34" charset="0"/>
+                <a:cs typeface="Arial" panose="020B0604020202020204" pitchFamily="34" charset="0"/>
+              </a:rPr>
+              <a:t> </a:t>
+            </a:r>
+            <a:r>
+              <a:rPr sz="2800" spc="25" dirty="0">
+                <a:latin typeface="Arial" panose="020B0604020202020204" pitchFamily="34" charset="0"/>
+                <a:cs typeface="Arial" panose="020B0604020202020204" pitchFamily="34" charset="0"/>
               </a:rPr>
               <a:t>и</a:t>
             </a:r>
             <a:r>
-              <a:rPr sz="2600" spc="35" dirty="0">
-                <a:latin typeface="Courier New"/>
-                <a:cs typeface="Courier New"/>
-              </a:rPr>
-              <a:t> </a:t>
-            </a:r>
-            <a:r>
-              <a:rPr sz="2600" spc="25" dirty="0">
-                <a:latin typeface="Courier New"/>
-                <a:cs typeface="Courier New"/>
+              <a:rPr sz="2800" spc="35" dirty="0">
+                <a:latin typeface="Arial" panose="020B0604020202020204" pitchFamily="34" charset="0"/>
+                <a:cs typeface="Arial" panose="020B0604020202020204" pitchFamily="34" charset="0"/>
+              </a:rPr>
+              <a:t> </a:t>
+            </a:r>
+            <a:r>
+              <a:rPr sz="2800" spc="25" dirty="0">
+                <a:latin typeface="Arial" panose="020B0604020202020204" pitchFamily="34" charset="0"/>
+                <a:cs typeface="Arial" panose="020B0604020202020204" pitchFamily="34" charset="0"/>
               </a:rPr>
               <a:t>туда</a:t>
             </a:r>
             <a:r>
-              <a:rPr sz="2600" spc="30" dirty="0">
-                <a:latin typeface="Courier New"/>
-                <a:cs typeface="Courier New"/>
-              </a:rPr>
-              <a:t> </a:t>
-            </a:r>
-            <a:r>
-              <a:rPr sz="2600" spc="25" dirty="0">
-                <a:latin typeface="Courier New"/>
-                <a:cs typeface="Courier New"/>
+              <a:rPr sz="2800" spc="30" dirty="0">
+                <a:latin typeface="Arial" panose="020B0604020202020204" pitchFamily="34" charset="0"/>
+                <a:cs typeface="Arial" panose="020B0604020202020204" pitchFamily="34" charset="0"/>
+              </a:rPr>
+              <a:t> </a:t>
+            </a:r>
+            <a:r>
+              <a:rPr sz="2800" spc="25" dirty="0">
+                <a:latin typeface="Arial" panose="020B0604020202020204" pitchFamily="34" charset="0"/>
+                <a:cs typeface="Arial" panose="020B0604020202020204" pitchFamily="34" charset="0"/>
               </a:rPr>
               <a:t>(на</a:t>
             </a:r>
             <a:r>
-              <a:rPr sz="2600" spc="35" dirty="0">
-                <a:latin typeface="Courier New"/>
-                <a:cs typeface="Courier New"/>
-              </a:rPr>
-              <a:t> </a:t>
-            </a:r>
-            <a:r>
-              <a:rPr sz="2600" spc="25" dirty="0">
-                <a:latin typeface="Courier New"/>
-                <a:cs typeface="Courier New"/>
+              <a:rPr sz="2800" spc="35" dirty="0">
+                <a:latin typeface="Arial" panose="020B0604020202020204" pitchFamily="34" charset="0"/>
+                <a:cs typeface="Arial" panose="020B0604020202020204" pitchFamily="34" charset="0"/>
+              </a:rPr>
+              <a:t> </a:t>
+            </a:r>
+            <a:r>
+              <a:rPr sz="2800" spc="25" dirty="0">
+                <a:latin typeface="Arial" panose="020B0604020202020204" pitchFamily="34" charset="0"/>
+                <a:cs typeface="Arial" panose="020B0604020202020204" pitchFamily="34" charset="0"/>
               </a:rPr>
               <a:t>самом</a:t>
             </a:r>
             <a:r>
-              <a:rPr sz="2600" spc="30" dirty="0">
-                <a:latin typeface="Courier New"/>
-                <a:cs typeface="Courier New"/>
-              </a:rPr>
-              <a:t> </a:t>
-            </a:r>
-            <a:r>
-              <a:rPr sz="2600" spc="25" dirty="0">
-                <a:latin typeface="Courier New"/>
-                <a:cs typeface="Courier New"/>
+              <a:rPr sz="2800" spc="30" dirty="0">
+                <a:latin typeface="Arial" panose="020B0604020202020204" pitchFamily="34" charset="0"/>
+                <a:cs typeface="Arial" panose="020B0604020202020204" pitchFamily="34" charset="0"/>
+              </a:rPr>
+              <a:t> </a:t>
+            </a:r>
+            <a:r>
+              <a:rPr sz="2800" spc="25" dirty="0">
+                <a:latin typeface="Arial" panose="020B0604020202020204" pitchFamily="34" charset="0"/>
+                <a:cs typeface="Arial" panose="020B0604020202020204" pitchFamily="34" charset="0"/>
               </a:rPr>
               <a:t>деле</a:t>
             </a:r>
             <a:r>
-              <a:rPr sz="2600" spc="35" dirty="0">
-                <a:latin typeface="Courier New"/>
-                <a:cs typeface="Courier New"/>
-              </a:rPr>
-              <a:t> </a:t>
-            </a:r>
-            <a:r>
-              <a:rPr sz="2600" spc="25" dirty="0">
-                <a:latin typeface="Courier New"/>
-                <a:cs typeface="Courier New"/>
+              <a:rPr sz="2800" spc="35" dirty="0">
+                <a:latin typeface="Arial" panose="020B0604020202020204" pitchFamily="34" charset="0"/>
+                <a:cs typeface="Arial" panose="020B0604020202020204" pitchFamily="34" charset="0"/>
+              </a:rPr>
+              <a:t> </a:t>
+            </a:r>
+            <a:r>
+              <a:rPr sz="2800" spc="25" dirty="0">
+                <a:latin typeface="Arial" panose="020B0604020202020204" pitchFamily="34" charset="0"/>
+                <a:cs typeface="Arial" panose="020B0604020202020204" pitchFamily="34" charset="0"/>
               </a:rPr>
               <a:t>устарел,</a:t>
             </a:r>
             <a:r>
-              <a:rPr sz="2600" spc="30" dirty="0">
-                <a:latin typeface="Courier New"/>
-                <a:cs typeface="Courier New"/>
-              </a:rPr>
-              <a:t> </a:t>
-            </a:r>
-            <a:r>
-              <a:rPr sz="2600" spc="25" dirty="0">
-                <a:latin typeface="Courier New"/>
-                <a:cs typeface="Courier New"/>
+              <a:rPr sz="2800" spc="30" dirty="0">
+                <a:latin typeface="Arial" panose="020B0604020202020204" pitchFamily="34" charset="0"/>
+                <a:cs typeface="Arial" panose="020B0604020202020204" pitchFamily="34" charset="0"/>
+              </a:rPr>
+              <a:t> </a:t>
+            </a:r>
+            <a:r>
+              <a:rPr sz="2800" spc="25" dirty="0">
+                <a:latin typeface="Arial" panose="020B0604020202020204" pitchFamily="34" charset="0"/>
+                <a:cs typeface="Arial" panose="020B0604020202020204" pitchFamily="34" charset="0"/>
               </a:rPr>
               <a:t>должен</a:t>
             </a:r>
             <a:r>
-              <a:rPr sz="2600" spc="35" dirty="0">
-                <a:latin typeface="Courier New"/>
-                <a:cs typeface="Courier New"/>
-              </a:rPr>
-              <a:t> </a:t>
-            </a:r>
-            <a:r>
-              <a:rPr sz="2600" spc="25" dirty="0">
-                <a:latin typeface="Courier New"/>
-                <a:cs typeface="Courier New"/>
+              <a:rPr sz="2800" spc="35" dirty="0">
+                <a:latin typeface="Arial" panose="020B0604020202020204" pitchFamily="34" charset="0"/>
+                <a:cs typeface="Arial" panose="020B0604020202020204" pitchFamily="34" charset="0"/>
+              </a:rPr>
+              <a:t> </a:t>
+            </a:r>
+            <a:r>
+              <a:rPr sz="2800" spc="25" dirty="0">
+                <a:latin typeface="Arial" panose="020B0604020202020204" pitchFamily="34" charset="0"/>
+                <a:cs typeface="Arial" panose="020B0604020202020204" pitchFamily="34" charset="0"/>
               </a:rPr>
               <a:t>быть</a:t>
             </a:r>
-            <a:endParaRPr sz="2600" dirty="0">
-              <a:latin typeface="Courier New"/>
-              <a:cs typeface="Courier New"/>
+            <a:endParaRPr sz="2800" dirty="0">
+              <a:latin typeface="Arial" panose="020B0604020202020204" pitchFamily="34" charset="0"/>
+              <a:cs typeface="Arial" panose="020B0604020202020204" pitchFamily="34" charset="0"/>
             </a:endParaRPr>
           </a:p>
           <a:p>
@@ -4396,15 +4478,15 @@
               </a:spcBef>
             </a:pPr>
             <a:r>
-              <a:rPr sz="2600" spc="25" dirty="0">
-                <a:latin typeface="Courier New"/>
-                <a:cs typeface="Courier New"/>
+              <a:rPr sz="2800" spc="25" dirty="0">
+                <a:latin typeface="Arial" panose="020B0604020202020204" pitchFamily="34" charset="0"/>
+                <a:cs typeface="Arial" panose="020B0604020202020204" pitchFamily="34" charset="0"/>
               </a:rPr>
               <a:t>NULL)</a:t>
             </a:r>
-            <a:endParaRPr sz="2600" dirty="0">
-              <a:latin typeface="Courier New"/>
-              <a:cs typeface="Courier New"/>
+            <a:endParaRPr sz="2800" dirty="0">
+              <a:latin typeface="Arial" panose="020B0604020202020204" pitchFamily="34" charset="0"/>
+              <a:cs typeface="Arial" panose="020B0604020202020204" pitchFamily="34" charset="0"/>
             </a:endParaRPr>
           </a:p>
         </p:txBody>
@@ -4675,7 +4757,7 @@
               </a:rPr>
               <a:t>time_t  long</a:t>
             </a:r>
-            <a:endParaRPr sz="2600">
+            <a:endParaRPr sz="2600" dirty="0">
               <a:latin typeface="Courier New"/>
               <a:cs typeface="Courier New"/>
             </a:endParaRPr>
@@ -4696,7 +4778,7 @@
               </a:rPr>
               <a:t>};</a:t>
             </a:r>
-            <a:endParaRPr sz="2600">
+            <a:endParaRPr sz="2600" dirty="0">
               <a:latin typeface="Courier New"/>
               <a:cs typeface="Courier New"/>
             </a:endParaRPr>
@@ -4776,8 +4858,8 @@
         </p:nvSpPr>
         <p:spPr>
           <a:xfrm>
-            <a:off x="1444682" y="2759075"/>
-            <a:ext cx="17202150" cy="6955108"/>
+            <a:off x="1060450" y="2454275"/>
+            <a:ext cx="17592675" cy="7667211"/>
           </a:xfrm>
           <a:prstGeom prst="rect">
             <a:avLst/>
@@ -4798,56 +4880,56 @@
               </a:spcBef>
             </a:pPr>
             <a:r>
-              <a:rPr sz="2400" b="1" spc="15" dirty="0">
+              <a:rPr sz="2800" b="1" spc="15" dirty="0">
                 <a:latin typeface="Arial" panose="020B0604020202020204" pitchFamily="34" charset="0"/>
                 <a:cs typeface="Arial" panose="020B0604020202020204" pitchFamily="34" charset="0"/>
               </a:rPr>
               <a:t>int</a:t>
             </a:r>
             <a:r>
-              <a:rPr sz="2400" b="1" spc="10" dirty="0">
-                <a:latin typeface="Arial" panose="020B0604020202020204" pitchFamily="34" charset="0"/>
-                <a:cs typeface="Arial" panose="020B0604020202020204" pitchFamily="34" charset="0"/>
-              </a:rPr>
-              <a:t> </a:t>
-            </a:r>
-            <a:r>
-              <a:rPr sz="2400" b="1" spc="15" dirty="0">
+              <a:rPr sz="2800" b="1" spc="10" dirty="0">
+                <a:latin typeface="Arial" panose="020B0604020202020204" pitchFamily="34" charset="0"/>
+                <a:cs typeface="Arial" panose="020B0604020202020204" pitchFamily="34" charset="0"/>
+              </a:rPr>
+              <a:t> </a:t>
+            </a:r>
+            <a:r>
+              <a:rPr sz="2800" b="1" spc="15" dirty="0">
                 <a:latin typeface="Arial" panose="020B0604020202020204" pitchFamily="34" charset="0"/>
                 <a:cs typeface="Arial" panose="020B0604020202020204" pitchFamily="34" charset="0"/>
               </a:rPr>
               <a:t>open(const</a:t>
             </a:r>
             <a:r>
-              <a:rPr sz="2400" b="1" spc="5" dirty="0">
-                <a:latin typeface="Arial" panose="020B0604020202020204" pitchFamily="34" charset="0"/>
-                <a:cs typeface="Arial" panose="020B0604020202020204" pitchFamily="34" charset="0"/>
-              </a:rPr>
-              <a:t> </a:t>
-            </a:r>
-            <a:r>
-              <a:rPr sz="2400" b="1" spc="15" dirty="0">
+              <a:rPr sz="2800" b="1" spc="5" dirty="0">
+                <a:latin typeface="Arial" panose="020B0604020202020204" pitchFamily="34" charset="0"/>
+                <a:cs typeface="Arial" panose="020B0604020202020204" pitchFamily="34" charset="0"/>
+              </a:rPr>
+              <a:t> </a:t>
+            </a:r>
+            <a:r>
+              <a:rPr sz="2800" b="1" spc="15" dirty="0">
                 <a:latin typeface="Arial" panose="020B0604020202020204" pitchFamily="34" charset="0"/>
                 <a:cs typeface="Arial" panose="020B0604020202020204" pitchFamily="34" charset="0"/>
               </a:rPr>
               <a:t>char</a:t>
             </a:r>
             <a:r>
-              <a:rPr sz="2400" b="1" spc="10" dirty="0">
-                <a:latin typeface="Arial" panose="020B0604020202020204" pitchFamily="34" charset="0"/>
-                <a:cs typeface="Arial" panose="020B0604020202020204" pitchFamily="34" charset="0"/>
-              </a:rPr>
-              <a:t> </a:t>
-            </a:r>
-            <a:r>
-              <a:rPr sz="2400" b="1" spc="15" dirty="0">
+              <a:rPr sz="2800" b="1" spc="10" dirty="0">
+                <a:latin typeface="Arial" panose="020B0604020202020204" pitchFamily="34" charset="0"/>
+                <a:cs typeface="Arial" panose="020B0604020202020204" pitchFamily="34" charset="0"/>
+              </a:rPr>
+              <a:t> </a:t>
+            </a:r>
+            <a:r>
+              <a:rPr sz="2800" b="1" spc="15" dirty="0">
                 <a:latin typeface="Arial" panose="020B0604020202020204" pitchFamily="34" charset="0"/>
                 <a:cs typeface="Arial" panose="020B0604020202020204" pitchFamily="34" charset="0"/>
               </a:rPr>
               <a:t>*</a:t>
             </a:r>
             <a:r>
-              <a:rPr sz="2400" u="sng" spc="15" dirty="0">
+              <a:rPr sz="2800" u="sng" spc="15" dirty="0">
                 <a:uFill>
                   <a:solidFill>
                     <a:srgbClr val="000000"/>
@@ -4859,35 +4941,35 @@
               <a:t>pathname</a:t>
             </a:r>
             <a:r>
-              <a:rPr sz="2400" b="1" spc="15" dirty="0">
+              <a:rPr sz="2800" b="1" spc="15" dirty="0">
                 <a:latin typeface="Arial" panose="020B0604020202020204" pitchFamily="34" charset="0"/>
                 <a:cs typeface="Arial" panose="020B0604020202020204" pitchFamily="34" charset="0"/>
               </a:rPr>
               <a:t>,</a:t>
             </a:r>
             <a:r>
-              <a:rPr sz="2400" b="1" spc="10" dirty="0">
-                <a:latin typeface="Arial" panose="020B0604020202020204" pitchFamily="34" charset="0"/>
-                <a:cs typeface="Arial" panose="020B0604020202020204" pitchFamily="34" charset="0"/>
-              </a:rPr>
-              <a:t> </a:t>
-            </a:r>
-            <a:r>
-              <a:rPr sz="2400" b="1" spc="15" dirty="0">
+              <a:rPr sz="2800" b="1" spc="10" dirty="0">
+                <a:latin typeface="Arial" panose="020B0604020202020204" pitchFamily="34" charset="0"/>
+                <a:cs typeface="Arial" panose="020B0604020202020204" pitchFamily="34" charset="0"/>
+              </a:rPr>
+              <a:t> </a:t>
+            </a:r>
+            <a:r>
+              <a:rPr sz="2800" b="1" spc="15" dirty="0">
                 <a:latin typeface="Arial" panose="020B0604020202020204" pitchFamily="34" charset="0"/>
                 <a:cs typeface="Arial" panose="020B0604020202020204" pitchFamily="34" charset="0"/>
               </a:rPr>
               <a:t>int</a:t>
             </a:r>
             <a:r>
-              <a:rPr sz="2400" b="1" spc="10" dirty="0">
-                <a:latin typeface="Arial" panose="020B0604020202020204" pitchFamily="34" charset="0"/>
-                <a:cs typeface="Arial" panose="020B0604020202020204" pitchFamily="34" charset="0"/>
-              </a:rPr>
-              <a:t> </a:t>
-            </a:r>
-            <a:r>
-              <a:rPr sz="2400" u="sng" spc="15" dirty="0">
+              <a:rPr sz="2800" b="1" spc="10" dirty="0">
+                <a:latin typeface="Arial" panose="020B0604020202020204" pitchFamily="34" charset="0"/>
+                <a:cs typeface="Arial" panose="020B0604020202020204" pitchFamily="34" charset="0"/>
+              </a:rPr>
+              <a:t> </a:t>
+            </a:r>
+            <a:r>
+              <a:rPr sz="2800" u="sng" spc="15" dirty="0">
                 <a:uFill>
                   <a:solidFill>
                     <a:srgbClr val="000000"/>
@@ -4899,7 +4981,7 @@
               <a:t>flags</a:t>
             </a:r>
             <a:r>
-              <a:rPr sz="2400" u="sng" spc="10" dirty="0">
+              <a:rPr sz="2800" u="sng" spc="10" dirty="0">
                 <a:uFill>
                   <a:solidFill>
                     <a:srgbClr val="000000"/>
@@ -4911,7 +4993,7 @@
               <a:t> </a:t>
             </a:r>
             <a:r>
-              <a:rPr sz="2400" u="sng" spc="15" dirty="0">
+              <a:rPr sz="2800" u="sng" spc="15" dirty="0">
                 <a:solidFill>
                   <a:srgbClr val="017100"/>
                 </a:solidFill>
@@ -4926,7 +5008,7 @@
               <a:t>/*,</a:t>
             </a:r>
             <a:r>
-              <a:rPr sz="2400" u="sng" spc="5" dirty="0">
+              <a:rPr sz="2800" u="sng" spc="5" dirty="0">
                 <a:solidFill>
                   <a:srgbClr val="017100"/>
                 </a:solidFill>
@@ -4941,7 +5023,7 @@
               <a:t> </a:t>
             </a:r>
             <a:r>
-              <a:rPr sz="2400" b="1" spc="15" dirty="0">
+              <a:rPr sz="2800" b="1" spc="15" dirty="0">
                 <a:solidFill>
                   <a:srgbClr val="017100"/>
                 </a:solidFill>
@@ -4951,7 +5033,7 @@
               <a:t>mode_t</a:t>
             </a:r>
             <a:r>
-              <a:rPr sz="2400" b="1" spc="10" dirty="0">
+              <a:rPr sz="2800" b="1" spc="10" dirty="0">
                 <a:solidFill>
                   <a:srgbClr val="017100"/>
                 </a:solidFill>
@@ -4961,7 +5043,7 @@
               <a:t> </a:t>
             </a:r>
             <a:r>
-              <a:rPr sz="2400" u="sng" spc="15" dirty="0">
+              <a:rPr sz="2800" u="sng" spc="15" dirty="0">
                 <a:solidFill>
                   <a:srgbClr val="017100"/>
                 </a:solidFill>
@@ -4976,7 +5058,7 @@
               <a:t>mode</a:t>
             </a:r>
             <a:r>
-              <a:rPr sz="2400" u="sng" spc="10" dirty="0">
+              <a:rPr sz="2800" u="sng" spc="10" dirty="0">
                 <a:solidFill>
                   <a:srgbClr val="017100"/>
                 </a:solidFill>
@@ -4991,13 +5073,13 @@
               <a:t> */</a:t>
             </a:r>
             <a:r>
-              <a:rPr sz="2400" b="1" spc="10" dirty="0">
+              <a:rPr sz="2800" b="1" spc="10" dirty="0">
                 <a:latin typeface="Arial" panose="020B0604020202020204" pitchFamily="34" charset="0"/>
                 <a:cs typeface="Arial" panose="020B0604020202020204" pitchFamily="34" charset="0"/>
               </a:rPr>
               <a:t>);</a:t>
             </a:r>
-            <a:endParaRPr sz="2400" dirty="0">
+            <a:endParaRPr sz="2800" dirty="0">
               <a:latin typeface="Arial" panose="020B0604020202020204" pitchFamily="34" charset="0"/>
               <a:cs typeface="Arial" panose="020B0604020202020204" pitchFamily="34" charset="0"/>
             </a:endParaRPr>
@@ -5009,35 +5091,35 @@
               </a:lnSpc>
             </a:pPr>
             <a:r>
-              <a:rPr sz="2400" b="1" spc="15" dirty="0">
+              <a:rPr sz="2800" b="1" spc="15" dirty="0">
                 <a:latin typeface="Arial" panose="020B0604020202020204" pitchFamily="34" charset="0"/>
                 <a:cs typeface="Arial" panose="020B0604020202020204" pitchFamily="34" charset="0"/>
               </a:rPr>
               <a:t>int</a:t>
             </a:r>
             <a:r>
-              <a:rPr sz="2400" b="1" spc="10" dirty="0">
-                <a:latin typeface="Arial" panose="020B0604020202020204" pitchFamily="34" charset="0"/>
-                <a:cs typeface="Arial" panose="020B0604020202020204" pitchFamily="34" charset="0"/>
-              </a:rPr>
-              <a:t> </a:t>
-            </a:r>
-            <a:r>
-              <a:rPr sz="2400" b="1" spc="15" dirty="0">
+              <a:rPr sz="2800" b="1" spc="10" dirty="0">
+                <a:latin typeface="Arial" panose="020B0604020202020204" pitchFamily="34" charset="0"/>
+                <a:cs typeface="Arial" panose="020B0604020202020204" pitchFamily="34" charset="0"/>
+              </a:rPr>
+              <a:t> </a:t>
+            </a:r>
+            <a:r>
+              <a:rPr sz="2800" b="1" spc="15" dirty="0">
                 <a:latin typeface="Arial" panose="020B0604020202020204" pitchFamily="34" charset="0"/>
                 <a:cs typeface="Arial" panose="020B0604020202020204" pitchFamily="34" charset="0"/>
               </a:rPr>
               <a:t>openat(int</a:t>
             </a:r>
             <a:r>
-              <a:rPr sz="2400" b="1" spc="5" dirty="0">
-                <a:latin typeface="Arial" panose="020B0604020202020204" pitchFamily="34" charset="0"/>
-                <a:cs typeface="Arial" panose="020B0604020202020204" pitchFamily="34" charset="0"/>
-              </a:rPr>
-              <a:t> </a:t>
-            </a:r>
-            <a:r>
-              <a:rPr sz="2400" u="sng" spc="15" dirty="0">
+              <a:rPr sz="2800" b="1" spc="5" dirty="0">
+                <a:latin typeface="Arial" panose="020B0604020202020204" pitchFamily="34" charset="0"/>
+                <a:cs typeface="Arial" panose="020B0604020202020204" pitchFamily="34" charset="0"/>
+              </a:rPr>
+              <a:t> </a:t>
+            </a:r>
+            <a:r>
+              <a:rPr sz="2800" u="sng" spc="15" dirty="0">
                 <a:uFill>
                   <a:solidFill>
                     <a:srgbClr val="000000"/>
@@ -5049,28 +5131,28 @@
               <a:t>dirfd</a:t>
             </a:r>
             <a:r>
-              <a:rPr sz="2400" b="1" spc="15" dirty="0">
+              <a:rPr sz="2800" b="1" spc="15" dirty="0">
                 <a:latin typeface="Arial" panose="020B0604020202020204" pitchFamily="34" charset="0"/>
                 <a:cs typeface="Arial" panose="020B0604020202020204" pitchFamily="34" charset="0"/>
               </a:rPr>
               <a:t>, const</a:t>
             </a:r>
             <a:r>
-              <a:rPr sz="2400" b="1" spc="10" dirty="0">
-                <a:latin typeface="Arial" panose="020B0604020202020204" pitchFamily="34" charset="0"/>
-                <a:cs typeface="Arial" panose="020B0604020202020204" pitchFamily="34" charset="0"/>
-              </a:rPr>
-              <a:t> </a:t>
-            </a:r>
-            <a:r>
-              <a:rPr sz="2400" b="1" spc="15" dirty="0">
+              <a:rPr sz="2800" b="1" spc="10" dirty="0">
+                <a:latin typeface="Arial" panose="020B0604020202020204" pitchFamily="34" charset="0"/>
+                <a:cs typeface="Arial" panose="020B0604020202020204" pitchFamily="34" charset="0"/>
+              </a:rPr>
+              <a:t> </a:t>
+            </a:r>
+            <a:r>
+              <a:rPr sz="2800" b="1" spc="15" dirty="0">
                 <a:latin typeface="Arial" panose="020B0604020202020204" pitchFamily="34" charset="0"/>
                 <a:cs typeface="Arial" panose="020B0604020202020204" pitchFamily="34" charset="0"/>
               </a:rPr>
               <a:t>char *</a:t>
             </a:r>
             <a:r>
-              <a:rPr sz="2400" u="sng" spc="15" dirty="0">
+              <a:rPr sz="2800" u="sng" spc="15" dirty="0">
                 <a:uFill>
                   <a:solidFill>
                     <a:srgbClr val="000000"/>
@@ -5082,35 +5164,35 @@
               <a:t>pathname</a:t>
             </a:r>
             <a:r>
-              <a:rPr sz="2400" b="1" spc="15" dirty="0">
+              <a:rPr sz="2800" b="1" spc="15" dirty="0">
                 <a:latin typeface="Arial" panose="020B0604020202020204" pitchFamily="34" charset="0"/>
                 <a:cs typeface="Arial" panose="020B0604020202020204" pitchFamily="34" charset="0"/>
               </a:rPr>
               <a:t>,</a:t>
             </a:r>
             <a:r>
-              <a:rPr sz="2400" b="1" spc="10" dirty="0">
-                <a:latin typeface="Arial" panose="020B0604020202020204" pitchFamily="34" charset="0"/>
-                <a:cs typeface="Arial" panose="020B0604020202020204" pitchFamily="34" charset="0"/>
-              </a:rPr>
-              <a:t> </a:t>
-            </a:r>
-            <a:r>
-              <a:rPr sz="2400" b="1" spc="15" dirty="0">
+              <a:rPr sz="2800" b="1" spc="10" dirty="0">
+                <a:latin typeface="Arial" panose="020B0604020202020204" pitchFamily="34" charset="0"/>
+                <a:cs typeface="Arial" panose="020B0604020202020204" pitchFamily="34" charset="0"/>
+              </a:rPr>
+              <a:t> </a:t>
+            </a:r>
+            <a:r>
+              <a:rPr sz="2800" b="1" spc="15" dirty="0">
                 <a:latin typeface="Arial" panose="020B0604020202020204" pitchFamily="34" charset="0"/>
                 <a:cs typeface="Arial" panose="020B0604020202020204" pitchFamily="34" charset="0"/>
               </a:rPr>
               <a:t>int</a:t>
             </a:r>
             <a:r>
-              <a:rPr sz="2400" b="1" spc="10" dirty="0">
-                <a:latin typeface="Arial" panose="020B0604020202020204" pitchFamily="34" charset="0"/>
-                <a:cs typeface="Arial" panose="020B0604020202020204" pitchFamily="34" charset="0"/>
-              </a:rPr>
-              <a:t> </a:t>
-            </a:r>
-            <a:r>
-              <a:rPr sz="2400" u="sng" spc="15" dirty="0">
+              <a:rPr sz="2800" b="1" spc="10" dirty="0">
+                <a:latin typeface="Arial" panose="020B0604020202020204" pitchFamily="34" charset="0"/>
+                <a:cs typeface="Arial" panose="020B0604020202020204" pitchFamily="34" charset="0"/>
+              </a:rPr>
+              <a:t> </a:t>
+            </a:r>
+            <a:r>
+              <a:rPr sz="2800" u="sng" spc="15" dirty="0">
                 <a:uFill>
                   <a:solidFill>
                     <a:srgbClr val="000000"/>
@@ -5122,7 +5204,7 @@
               <a:t>flags </a:t>
             </a:r>
             <a:r>
-              <a:rPr sz="2400" u="sng" spc="10" dirty="0">
+              <a:rPr sz="2800" u="sng" spc="10" dirty="0">
                 <a:solidFill>
                   <a:srgbClr val="017100"/>
                 </a:solidFill>
@@ -5137,7 +5219,7 @@
               <a:t>/*</a:t>
             </a:r>
             <a:r>
-              <a:rPr sz="2400" b="1" spc="10" dirty="0">
+              <a:rPr sz="2800" b="1" spc="10" dirty="0">
                 <a:solidFill>
                   <a:srgbClr val="017100"/>
                 </a:solidFill>
@@ -5147,7 +5229,7 @@
               <a:t>, </a:t>
             </a:r>
             <a:r>
-              <a:rPr sz="2400" b="1" spc="15" dirty="0">
+              <a:rPr sz="2800" b="1" spc="15" dirty="0">
                 <a:solidFill>
                   <a:srgbClr val="017100"/>
                 </a:solidFill>
@@ -5157,7 +5239,7 @@
               <a:t>mode_t </a:t>
             </a:r>
             <a:r>
-              <a:rPr sz="2400" u="sng" spc="15" dirty="0">
+              <a:rPr sz="2800" u="sng" spc="15" dirty="0">
                 <a:solidFill>
                   <a:srgbClr val="017100"/>
                 </a:solidFill>
@@ -5172,7 +5254,7 @@
               <a:t>mode</a:t>
             </a:r>
             <a:r>
-              <a:rPr sz="2400" u="sng" spc="10" dirty="0">
+              <a:rPr sz="2800" u="sng" spc="10" dirty="0">
                 <a:solidFill>
                   <a:srgbClr val="017100"/>
                 </a:solidFill>
@@ -5187,13 +5269,13 @@
               <a:t> */</a:t>
             </a:r>
             <a:r>
-              <a:rPr sz="2400" b="1" spc="10" dirty="0">
+              <a:rPr sz="2800" b="1" spc="10" dirty="0">
                 <a:latin typeface="Arial" panose="020B0604020202020204" pitchFamily="34" charset="0"/>
                 <a:cs typeface="Arial" panose="020B0604020202020204" pitchFamily="34" charset="0"/>
               </a:rPr>
               <a:t>);</a:t>
             </a:r>
-            <a:endParaRPr sz="2400" dirty="0">
+            <a:endParaRPr sz="2800" dirty="0">
               <a:latin typeface="Arial" panose="020B0604020202020204" pitchFamily="34" charset="0"/>
               <a:cs typeface="Arial" panose="020B0604020202020204" pitchFamily="34" charset="0"/>
             </a:endParaRPr>
@@ -5207,7 +5289,7 @@
                 <a:spcPts val="30"/>
               </a:spcBef>
             </a:pPr>
-            <a:endParaRPr sz="2400" dirty="0">
+            <a:endParaRPr sz="2800" dirty="0">
               <a:latin typeface="Arial" panose="020B0604020202020204" pitchFamily="34" charset="0"/>
               <a:cs typeface="Arial" panose="020B0604020202020204" pitchFamily="34" charset="0"/>
             </a:endParaRPr>
@@ -5219,13 +5301,13 @@
               </a:lnSpc>
             </a:pPr>
             <a:r>
-              <a:rPr sz="2400" b="1" spc="15" dirty="0">
+              <a:rPr sz="2800" b="1" spc="15" dirty="0">
                 <a:latin typeface="Arial" panose="020B0604020202020204" pitchFamily="34" charset="0"/>
                 <a:cs typeface="Arial" panose="020B0604020202020204" pitchFamily="34" charset="0"/>
               </a:rPr>
               <a:t>Flags:</a:t>
             </a:r>
-            <a:endParaRPr sz="2400" dirty="0">
+            <a:endParaRPr sz="2800" dirty="0">
               <a:latin typeface="Arial" panose="020B0604020202020204" pitchFamily="34" charset="0"/>
               <a:cs typeface="Arial" panose="020B0604020202020204" pitchFamily="34" charset="0"/>
             </a:endParaRPr>
@@ -5237,132 +5319,132 @@
               </a:lnSpc>
             </a:pPr>
             <a:r>
-              <a:rPr sz="2400" spc="15" dirty="0">
+              <a:rPr sz="2800" spc="15" dirty="0">
                 <a:latin typeface="Arial" panose="020B0604020202020204" pitchFamily="34" charset="0"/>
                 <a:cs typeface="Arial" panose="020B0604020202020204" pitchFamily="34" charset="0"/>
               </a:rPr>
               <a:t>Должен</a:t>
             </a:r>
             <a:r>
-              <a:rPr sz="2400" spc="5" dirty="0">
-                <a:latin typeface="Arial" panose="020B0604020202020204" pitchFamily="34" charset="0"/>
-                <a:cs typeface="Arial" panose="020B0604020202020204" pitchFamily="34" charset="0"/>
-              </a:rPr>
-              <a:t> </a:t>
-            </a:r>
-            <a:r>
-              <a:rPr sz="2400" spc="15" dirty="0">
+              <a:rPr sz="2800" spc="5" dirty="0">
+                <a:latin typeface="Arial" panose="020B0604020202020204" pitchFamily="34" charset="0"/>
+                <a:cs typeface="Arial" panose="020B0604020202020204" pitchFamily="34" charset="0"/>
+              </a:rPr>
+              <a:t> </a:t>
+            </a:r>
+            <a:r>
+              <a:rPr sz="2800" spc="15" dirty="0">
                 <a:latin typeface="Arial" panose="020B0604020202020204" pitchFamily="34" charset="0"/>
                 <a:cs typeface="Arial" panose="020B0604020202020204" pitchFamily="34" charset="0"/>
               </a:rPr>
               <a:t>быть</a:t>
             </a:r>
             <a:r>
-              <a:rPr sz="2400" spc="10" dirty="0">
-                <a:latin typeface="Arial" panose="020B0604020202020204" pitchFamily="34" charset="0"/>
-                <a:cs typeface="Arial" panose="020B0604020202020204" pitchFamily="34" charset="0"/>
-              </a:rPr>
-              <a:t> </a:t>
-            </a:r>
-            <a:r>
-              <a:rPr sz="2400" spc="15" dirty="0">
+              <a:rPr sz="2800" spc="10" dirty="0">
+                <a:latin typeface="Arial" panose="020B0604020202020204" pitchFamily="34" charset="0"/>
+                <a:cs typeface="Arial" panose="020B0604020202020204" pitchFamily="34" charset="0"/>
+              </a:rPr>
+              <a:t> </a:t>
+            </a:r>
+            <a:r>
+              <a:rPr sz="2800" spc="15" dirty="0">
                 <a:latin typeface="Arial" panose="020B0604020202020204" pitchFamily="34" charset="0"/>
                 <a:cs typeface="Arial" panose="020B0604020202020204" pitchFamily="34" charset="0"/>
               </a:rPr>
               <a:t>один</a:t>
             </a:r>
             <a:r>
-              <a:rPr sz="2400" spc="5" dirty="0">
-                <a:latin typeface="Arial" panose="020B0604020202020204" pitchFamily="34" charset="0"/>
-                <a:cs typeface="Arial" panose="020B0604020202020204" pitchFamily="34" charset="0"/>
-              </a:rPr>
-              <a:t> </a:t>
-            </a:r>
-            <a:r>
-              <a:rPr sz="2400" spc="15" dirty="0">
+              <a:rPr sz="2800" spc="5" dirty="0">
+                <a:latin typeface="Arial" panose="020B0604020202020204" pitchFamily="34" charset="0"/>
+                <a:cs typeface="Arial" panose="020B0604020202020204" pitchFamily="34" charset="0"/>
+              </a:rPr>
+              <a:t> </a:t>
+            </a:r>
+            <a:r>
+              <a:rPr sz="2800" spc="15" dirty="0">
                 <a:latin typeface="Arial" panose="020B0604020202020204" pitchFamily="34" charset="0"/>
                 <a:cs typeface="Arial" panose="020B0604020202020204" pitchFamily="34" charset="0"/>
               </a:rPr>
               <a:t>из</a:t>
             </a:r>
             <a:r>
-              <a:rPr sz="2400" spc="5" dirty="0">
-                <a:latin typeface="Arial" panose="020B0604020202020204" pitchFamily="34" charset="0"/>
-                <a:cs typeface="Arial" panose="020B0604020202020204" pitchFamily="34" charset="0"/>
-              </a:rPr>
-              <a:t> </a:t>
-            </a:r>
-            <a:r>
-              <a:rPr sz="2400" b="1" spc="15" dirty="0">
+              <a:rPr sz="2800" spc="5" dirty="0">
+                <a:latin typeface="Arial" panose="020B0604020202020204" pitchFamily="34" charset="0"/>
+                <a:cs typeface="Arial" panose="020B0604020202020204" pitchFamily="34" charset="0"/>
+              </a:rPr>
+              <a:t> </a:t>
+            </a:r>
+            <a:r>
+              <a:rPr sz="2800" b="1" spc="15" dirty="0">
                 <a:latin typeface="Arial" panose="020B0604020202020204" pitchFamily="34" charset="0"/>
                 <a:cs typeface="Arial" panose="020B0604020202020204" pitchFamily="34" charset="0"/>
               </a:rPr>
               <a:t>access_mode</a:t>
             </a:r>
             <a:r>
-              <a:rPr sz="2400" spc="15" dirty="0">
+              <a:rPr sz="2800" spc="15" dirty="0">
                 <a:latin typeface="Arial" panose="020B0604020202020204" pitchFamily="34" charset="0"/>
                 <a:cs typeface="Arial" panose="020B0604020202020204" pitchFamily="34" charset="0"/>
               </a:rPr>
               <a:t>:</a:t>
             </a:r>
             <a:r>
-              <a:rPr sz="2400" spc="5" dirty="0">
-                <a:latin typeface="Arial" panose="020B0604020202020204" pitchFamily="34" charset="0"/>
-                <a:cs typeface="Arial" panose="020B0604020202020204" pitchFamily="34" charset="0"/>
-              </a:rPr>
-              <a:t> </a:t>
-            </a:r>
-            <a:r>
-              <a:rPr sz="2400" spc="15" dirty="0">
+              <a:rPr sz="2800" spc="5" dirty="0">
+                <a:latin typeface="Arial" panose="020B0604020202020204" pitchFamily="34" charset="0"/>
+                <a:cs typeface="Arial" panose="020B0604020202020204" pitchFamily="34" charset="0"/>
+              </a:rPr>
+              <a:t> </a:t>
+            </a:r>
+            <a:r>
+              <a:rPr sz="2800" spc="15" dirty="0">
                 <a:latin typeface="Arial" panose="020B0604020202020204" pitchFamily="34" charset="0"/>
                 <a:cs typeface="Arial" panose="020B0604020202020204" pitchFamily="34" charset="0"/>
               </a:rPr>
               <a:t>O_RDONLY,</a:t>
             </a:r>
             <a:r>
-              <a:rPr sz="2400" spc="10" dirty="0">
-                <a:latin typeface="Arial" panose="020B0604020202020204" pitchFamily="34" charset="0"/>
-                <a:cs typeface="Arial" panose="020B0604020202020204" pitchFamily="34" charset="0"/>
-              </a:rPr>
-              <a:t> </a:t>
-            </a:r>
-            <a:r>
-              <a:rPr sz="2400" spc="15" dirty="0">
+              <a:rPr sz="2800" spc="10" dirty="0">
+                <a:latin typeface="Arial" panose="020B0604020202020204" pitchFamily="34" charset="0"/>
+                <a:cs typeface="Arial" panose="020B0604020202020204" pitchFamily="34" charset="0"/>
+              </a:rPr>
+              <a:t> </a:t>
+            </a:r>
+            <a:r>
+              <a:rPr sz="2800" spc="15" dirty="0">
                 <a:latin typeface="Arial" panose="020B0604020202020204" pitchFamily="34" charset="0"/>
                 <a:cs typeface="Arial" panose="020B0604020202020204" pitchFamily="34" charset="0"/>
               </a:rPr>
               <a:t>O_WRONLY,</a:t>
             </a:r>
             <a:r>
-              <a:rPr sz="2400" spc="10" dirty="0">
-                <a:latin typeface="Arial" panose="020B0604020202020204" pitchFamily="34" charset="0"/>
-                <a:cs typeface="Arial" panose="020B0604020202020204" pitchFamily="34" charset="0"/>
-              </a:rPr>
-              <a:t> </a:t>
-            </a:r>
-            <a:r>
-              <a:rPr sz="2400" spc="15" dirty="0">
+              <a:rPr sz="2800" spc="10" dirty="0">
+                <a:latin typeface="Arial" panose="020B0604020202020204" pitchFamily="34" charset="0"/>
+                <a:cs typeface="Arial" panose="020B0604020202020204" pitchFamily="34" charset="0"/>
+              </a:rPr>
+              <a:t> </a:t>
+            </a:r>
+            <a:r>
+              <a:rPr sz="2800" spc="15" dirty="0">
                 <a:latin typeface="Arial" panose="020B0604020202020204" pitchFamily="34" charset="0"/>
                 <a:cs typeface="Arial" panose="020B0604020202020204" pitchFamily="34" charset="0"/>
               </a:rPr>
               <a:t>or</a:t>
             </a:r>
             <a:r>
-              <a:rPr sz="2400" spc="5" dirty="0">
-                <a:latin typeface="Arial" panose="020B0604020202020204" pitchFamily="34" charset="0"/>
-                <a:cs typeface="Arial" panose="020B0604020202020204" pitchFamily="34" charset="0"/>
-              </a:rPr>
-              <a:t> </a:t>
-            </a:r>
-            <a:r>
-              <a:rPr sz="2400" spc="15" dirty="0">
+              <a:rPr sz="2800" spc="5" dirty="0">
+                <a:latin typeface="Arial" panose="020B0604020202020204" pitchFamily="34" charset="0"/>
+                <a:cs typeface="Arial" panose="020B0604020202020204" pitchFamily="34" charset="0"/>
+              </a:rPr>
+              <a:t> </a:t>
+            </a:r>
+            <a:r>
+              <a:rPr sz="2800" spc="15" dirty="0">
                 <a:latin typeface="Arial" panose="020B0604020202020204" pitchFamily="34" charset="0"/>
                 <a:cs typeface="Arial" panose="020B0604020202020204" pitchFamily="34" charset="0"/>
               </a:rPr>
               <a:t>O_RDWR.</a:t>
             </a:r>
-            <a:endParaRPr sz="2400" dirty="0">
+            <a:endParaRPr sz="2800" dirty="0">
               <a:latin typeface="Arial" panose="020B0604020202020204" pitchFamily="34" charset="0"/>
               <a:cs typeface="Arial" panose="020B0604020202020204" pitchFamily="34" charset="0"/>
             </a:endParaRPr>
@@ -5374,90 +5456,90 @@
               </a:lnSpc>
             </a:pPr>
             <a:r>
-              <a:rPr sz="2400" spc="15" dirty="0">
+              <a:rPr sz="2800" spc="15" dirty="0">
                 <a:latin typeface="Arial" panose="020B0604020202020204" pitchFamily="34" charset="0"/>
                 <a:cs typeface="Arial" panose="020B0604020202020204" pitchFamily="34" charset="0"/>
               </a:rPr>
               <a:t>Могут</a:t>
             </a:r>
             <a:r>
-              <a:rPr sz="2400" dirty="0">
-                <a:latin typeface="Arial" panose="020B0604020202020204" pitchFamily="34" charset="0"/>
-                <a:cs typeface="Arial" panose="020B0604020202020204" pitchFamily="34" charset="0"/>
-              </a:rPr>
-              <a:t> </a:t>
-            </a:r>
-            <a:r>
-              <a:rPr sz="2400" spc="15" dirty="0">
+              <a:rPr sz="2800" dirty="0">
+                <a:latin typeface="Arial" panose="020B0604020202020204" pitchFamily="34" charset="0"/>
+                <a:cs typeface="Arial" panose="020B0604020202020204" pitchFamily="34" charset="0"/>
+              </a:rPr>
+              <a:t> </a:t>
+            </a:r>
+            <a:r>
+              <a:rPr sz="2800" spc="15" dirty="0">
                 <a:latin typeface="Arial" panose="020B0604020202020204" pitchFamily="34" charset="0"/>
                 <a:cs typeface="Arial" panose="020B0604020202020204" pitchFamily="34" charset="0"/>
               </a:rPr>
               <a:t>быть</a:t>
             </a:r>
             <a:r>
-              <a:rPr sz="2400" dirty="0">
-                <a:latin typeface="Arial" panose="020B0604020202020204" pitchFamily="34" charset="0"/>
-                <a:cs typeface="Arial" panose="020B0604020202020204" pitchFamily="34" charset="0"/>
-              </a:rPr>
-              <a:t> </a:t>
-            </a:r>
-            <a:r>
-              <a:rPr sz="2400" spc="15" dirty="0">
+              <a:rPr sz="2800" dirty="0">
+                <a:latin typeface="Arial" panose="020B0604020202020204" pitchFamily="34" charset="0"/>
+                <a:cs typeface="Arial" panose="020B0604020202020204" pitchFamily="34" charset="0"/>
+              </a:rPr>
+              <a:t> </a:t>
+            </a:r>
+            <a:r>
+              <a:rPr sz="2800" spc="15" dirty="0">
                 <a:latin typeface="Arial" panose="020B0604020202020204" pitchFamily="34" charset="0"/>
                 <a:cs typeface="Arial" panose="020B0604020202020204" pitchFamily="34" charset="0"/>
               </a:rPr>
               <a:t>(через</a:t>
             </a:r>
             <a:r>
-              <a:rPr sz="2400" dirty="0">
-                <a:latin typeface="Arial" panose="020B0604020202020204" pitchFamily="34" charset="0"/>
-                <a:cs typeface="Arial" panose="020B0604020202020204" pitchFamily="34" charset="0"/>
-              </a:rPr>
-              <a:t> </a:t>
-            </a:r>
-            <a:r>
-              <a:rPr sz="2400" spc="15" dirty="0">
+              <a:rPr sz="2800" dirty="0">
+                <a:latin typeface="Arial" panose="020B0604020202020204" pitchFamily="34" charset="0"/>
+                <a:cs typeface="Arial" panose="020B0604020202020204" pitchFamily="34" charset="0"/>
+              </a:rPr>
+              <a:t> </a:t>
+            </a:r>
+            <a:r>
+              <a:rPr sz="2800" spc="15" dirty="0">
                 <a:latin typeface="Arial" panose="020B0604020202020204" pitchFamily="34" charset="0"/>
                 <a:cs typeface="Arial" panose="020B0604020202020204" pitchFamily="34" charset="0"/>
               </a:rPr>
               <a:t>|)</a:t>
             </a:r>
             <a:r>
-              <a:rPr sz="2400" spc="-5" dirty="0">
-                <a:latin typeface="Arial" panose="020B0604020202020204" pitchFamily="34" charset="0"/>
-                <a:cs typeface="Arial" panose="020B0604020202020204" pitchFamily="34" charset="0"/>
-              </a:rPr>
-              <a:t> </a:t>
-            </a:r>
-            <a:r>
-              <a:rPr sz="2400" b="1" spc="15" dirty="0">
+              <a:rPr sz="2800" spc="-5" dirty="0">
+                <a:latin typeface="Arial" panose="020B0604020202020204" pitchFamily="34" charset="0"/>
+                <a:cs typeface="Arial" panose="020B0604020202020204" pitchFamily="34" charset="0"/>
+              </a:rPr>
+              <a:t> </a:t>
+            </a:r>
+            <a:r>
+              <a:rPr sz="2800" b="1" spc="15" dirty="0">
                 <a:latin typeface="Arial" panose="020B0604020202020204" pitchFamily="34" charset="0"/>
                 <a:cs typeface="Arial" panose="020B0604020202020204" pitchFamily="34" charset="0"/>
               </a:rPr>
               <a:t>creation</a:t>
             </a:r>
             <a:r>
-              <a:rPr sz="2400" b="1" dirty="0">
-                <a:latin typeface="Arial" panose="020B0604020202020204" pitchFamily="34" charset="0"/>
-                <a:cs typeface="Arial" panose="020B0604020202020204" pitchFamily="34" charset="0"/>
-              </a:rPr>
-              <a:t> </a:t>
-            </a:r>
-            <a:r>
-              <a:rPr sz="2400" b="1" spc="15" dirty="0">
+              <a:rPr sz="2800" b="1" dirty="0">
+                <a:latin typeface="Arial" panose="020B0604020202020204" pitchFamily="34" charset="0"/>
+                <a:cs typeface="Arial" panose="020B0604020202020204" pitchFamily="34" charset="0"/>
+              </a:rPr>
+              <a:t> </a:t>
+            </a:r>
+            <a:r>
+              <a:rPr sz="2800" b="1" spc="15" dirty="0">
                 <a:latin typeface="Arial" panose="020B0604020202020204" pitchFamily="34" charset="0"/>
                 <a:cs typeface="Arial" panose="020B0604020202020204" pitchFamily="34" charset="0"/>
               </a:rPr>
               <a:t>flags</a:t>
             </a:r>
             <a:r>
-              <a:rPr sz="2400" spc="15" dirty="0">
+              <a:rPr sz="2800" spc="15" dirty="0">
                 <a:latin typeface="Arial" panose="020B0604020202020204" pitchFamily="34" charset="0"/>
                 <a:cs typeface="Arial" panose="020B0604020202020204" pitchFamily="34" charset="0"/>
               </a:rPr>
               <a:t>:</a:t>
             </a:r>
-            <a:endParaRPr sz="2400" dirty="0">
+            <a:endParaRPr sz="2800" dirty="0">
               <a:latin typeface="Arial" panose="020B0604020202020204" pitchFamily="34" charset="0"/>
               <a:cs typeface="Arial" panose="020B0604020202020204" pitchFamily="34" charset="0"/>
             </a:endParaRPr>
@@ -5469,118 +5551,118 @@
               </a:lnSpc>
             </a:pPr>
             <a:r>
-              <a:rPr sz="2400" spc="15" dirty="0">
+              <a:rPr sz="2800" spc="15" dirty="0">
                 <a:latin typeface="Arial" panose="020B0604020202020204" pitchFamily="34" charset="0"/>
                 <a:cs typeface="Arial" panose="020B0604020202020204" pitchFamily="34" charset="0"/>
               </a:rPr>
               <a:t>O_CLOEXEC,</a:t>
             </a:r>
             <a:r>
-              <a:rPr sz="2400" spc="5" dirty="0">
-                <a:latin typeface="Arial" panose="020B0604020202020204" pitchFamily="34" charset="0"/>
-                <a:cs typeface="Arial" panose="020B0604020202020204" pitchFamily="34" charset="0"/>
-              </a:rPr>
-              <a:t> </a:t>
-            </a:r>
-            <a:r>
-              <a:rPr sz="2400" b="1" spc="15" dirty="0">
+              <a:rPr sz="2800" spc="5" dirty="0">
+                <a:latin typeface="Arial" panose="020B0604020202020204" pitchFamily="34" charset="0"/>
+                <a:cs typeface="Arial" panose="020B0604020202020204" pitchFamily="34" charset="0"/>
+              </a:rPr>
+              <a:t> </a:t>
+            </a:r>
+            <a:r>
+              <a:rPr sz="2800" b="1" spc="15" dirty="0">
                 <a:latin typeface="Arial" panose="020B0604020202020204" pitchFamily="34" charset="0"/>
                 <a:cs typeface="Arial" panose="020B0604020202020204" pitchFamily="34" charset="0"/>
               </a:rPr>
               <a:t>O_CREAT</a:t>
             </a:r>
             <a:r>
-              <a:rPr sz="2400" spc="15" dirty="0">
+              <a:rPr sz="2800" spc="15" dirty="0">
                 <a:latin typeface="Arial" panose="020B0604020202020204" pitchFamily="34" charset="0"/>
                 <a:cs typeface="Arial" panose="020B0604020202020204" pitchFamily="34" charset="0"/>
               </a:rPr>
               <a:t>,</a:t>
             </a:r>
             <a:r>
-              <a:rPr sz="2400" spc="10" dirty="0">
-                <a:latin typeface="Arial" panose="020B0604020202020204" pitchFamily="34" charset="0"/>
-                <a:cs typeface="Arial" panose="020B0604020202020204" pitchFamily="34" charset="0"/>
-              </a:rPr>
-              <a:t> </a:t>
-            </a:r>
-            <a:r>
-              <a:rPr sz="2400" spc="15" dirty="0">
+              <a:rPr sz="2800" spc="10" dirty="0">
+                <a:latin typeface="Arial" panose="020B0604020202020204" pitchFamily="34" charset="0"/>
+                <a:cs typeface="Arial" panose="020B0604020202020204" pitchFamily="34" charset="0"/>
+              </a:rPr>
+              <a:t> </a:t>
+            </a:r>
+            <a:r>
+              <a:rPr sz="2800" spc="15" dirty="0">
                 <a:latin typeface="Arial" panose="020B0604020202020204" pitchFamily="34" charset="0"/>
                 <a:cs typeface="Arial" panose="020B0604020202020204" pitchFamily="34" charset="0"/>
               </a:rPr>
               <a:t>O_DIRECTORY,</a:t>
             </a:r>
             <a:r>
-              <a:rPr sz="2400" spc="10" dirty="0">
-                <a:latin typeface="Arial" panose="020B0604020202020204" pitchFamily="34" charset="0"/>
-                <a:cs typeface="Arial" panose="020B0604020202020204" pitchFamily="34" charset="0"/>
-              </a:rPr>
-              <a:t> </a:t>
-            </a:r>
-            <a:r>
-              <a:rPr sz="2400" spc="15" dirty="0">
+              <a:rPr sz="2800" spc="10" dirty="0">
+                <a:latin typeface="Arial" panose="020B0604020202020204" pitchFamily="34" charset="0"/>
+                <a:cs typeface="Arial" panose="020B0604020202020204" pitchFamily="34" charset="0"/>
+              </a:rPr>
+              <a:t> </a:t>
+            </a:r>
+            <a:r>
+              <a:rPr sz="2800" spc="15" dirty="0">
                 <a:latin typeface="Arial" panose="020B0604020202020204" pitchFamily="34" charset="0"/>
                 <a:cs typeface="Arial" panose="020B0604020202020204" pitchFamily="34" charset="0"/>
               </a:rPr>
               <a:t>O_EXCL,</a:t>
             </a:r>
             <a:r>
-              <a:rPr sz="2400" spc="10" dirty="0">
-                <a:latin typeface="Arial" panose="020B0604020202020204" pitchFamily="34" charset="0"/>
-                <a:cs typeface="Arial" panose="020B0604020202020204" pitchFamily="34" charset="0"/>
-              </a:rPr>
-              <a:t> </a:t>
-            </a:r>
-            <a:r>
-              <a:rPr sz="2400" spc="15" dirty="0">
+              <a:rPr sz="2800" spc="10" dirty="0">
+                <a:latin typeface="Arial" panose="020B0604020202020204" pitchFamily="34" charset="0"/>
+                <a:cs typeface="Arial" panose="020B0604020202020204" pitchFamily="34" charset="0"/>
+              </a:rPr>
+              <a:t> </a:t>
+            </a:r>
+            <a:r>
+              <a:rPr sz="2800" spc="15" dirty="0">
                 <a:latin typeface="Arial" panose="020B0604020202020204" pitchFamily="34" charset="0"/>
                 <a:cs typeface="Arial" panose="020B0604020202020204" pitchFamily="34" charset="0"/>
               </a:rPr>
               <a:t>O_NOCTTY,</a:t>
             </a:r>
             <a:r>
-              <a:rPr sz="2400" spc="10" dirty="0">
-                <a:latin typeface="Arial" panose="020B0604020202020204" pitchFamily="34" charset="0"/>
-                <a:cs typeface="Arial" panose="020B0604020202020204" pitchFamily="34" charset="0"/>
-              </a:rPr>
-              <a:t> </a:t>
-            </a:r>
-            <a:r>
-              <a:rPr sz="2400" spc="15" dirty="0">
+              <a:rPr sz="2800" spc="10" dirty="0">
+                <a:latin typeface="Arial" panose="020B0604020202020204" pitchFamily="34" charset="0"/>
+                <a:cs typeface="Arial" panose="020B0604020202020204" pitchFamily="34" charset="0"/>
+              </a:rPr>
+              <a:t> </a:t>
+            </a:r>
+            <a:r>
+              <a:rPr sz="2800" spc="15" dirty="0">
                 <a:latin typeface="Arial" panose="020B0604020202020204" pitchFamily="34" charset="0"/>
                 <a:cs typeface="Arial" panose="020B0604020202020204" pitchFamily="34" charset="0"/>
               </a:rPr>
               <a:t>O_NOFOLLOW,</a:t>
             </a:r>
             <a:r>
-              <a:rPr sz="2400" spc="5" dirty="0">
-                <a:latin typeface="Arial" panose="020B0604020202020204" pitchFamily="34" charset="0"/>
-                <a:cs typeface="Arial" panose="020B0604020202020204" pitchFamily="34" charset="0"/>
-              </a:rPr>
-              <a:t> </a:t>
-            </a:r>
-            <a:r>
-              <a:rPr sz="2400" spc="15" dirty="0">
+              <a:rPr sz="2800" spc="5" dirty="0">
+                <a:latin typeface="Arial" panose="020B0604020202020204" pitchFamily="34" charset="0"/>
+                <a:cs typeface="Arial" panose="020B0604020202020204" pitchFamily="34" charset="0"/>
+              </a:rPr>
+              <a:t> </a:t>
+            </a:r>
+            <a:r>
+              <a:rPr sz="2800" spc="15" dirty="0">
                 <a:latin typeface="Arial" panose="020B0604020202020204" pitchFamily="34" charset="0"/>
                 <a:cs typeface="Arial" panose="020B0604020202020204" pitchFamily="34" charset="0"/>
               </a:rPr>
               <a:t>O_TMPFILE,</a:t>
             </a:r>
             <a:r>
-              <a:rPr sz="2400" spc="10" dirty="0">
-                <a:latin typeface="Arial" panose="020B0604020202020204" pitchFamily="34" charset="0"/>
-                <a:cs typeface="Arial" panose="020B0604020202020204" pitchFamily="34" charset="0"/>
-              </a:rPr>
-              <a:t> </a:t>
-            </a:r>
-            <a:r>
-              <a:rPr sz="2400" b="1" spc="15" dirty="0">
+              <a:rPr sz="2800" spc="10" dirty="0">
+                <a:latin typeface="Arial" panose="020B0604020202020204" pitchFamily="34" charset="0"/>
+                <a:cs typeface="Arial" panose="020B0604020202020204" pitchFamily="34" charset="0"/>
+              </a:rPr>
+              <a:t> </a:t>
+            </a:r>
+            <a:r>
+              <a:rPr sz="2800" b="1" spc="15" dirty="0">
                 <a:latin typeface="Arial" panose="020B0604020202020204" pitchFamily="34" charset="0"/>
                 <a:cs typeface="Arial" panose="020B0604020202020204" pitchFamily="34" charset="0"/>
               </a:rPr>
               <a:t>O_TRUNC</a:t>
             </a:r>
-            <a:endParaRPr sz="2400" dirty="0">
+            <a:endParaRPr sz="2800" dirty="0">
               <a:latin typeface="Arial" panose="020B0604020202020204" pitchFamily="34" charset="0"/>
               <a:cs typeface="Arial" panose="020B0604020202020204" pitchFamily="34" charset="0"/>
             </a:endParaRPr>
@@ -5592,13 +5674,13 @@
               </a:lnSpc>
             </a:pPr>
             <a:r>
-              <a:rPr sz="2400" b="1" spc="15" dirty="0">
+              <a:rPr sz="2800" b="1" spc="15" dirty="0">
                 <a:latin typeface="Arial" panose="020B0604020202020204" pitchFamily="34" charset="0"/>
                 <a:cs typeface="Arial" panose="020B0604020202020204" pitchFamily="34" charset="0"/>
               </a:rPr>
               <a:t>Mode:</a:t>
             </a:r>
-            <a:endParaRPr sz="2400" dirty="0">
+            <a:endParaRPr sz="2800" dirty="0">
               <a:latin typeface="Arial" panose="020B0604020202020204" pitchFamily="34" charset="0"/>
               <a:cs typeface="Arial" panose="020B0604020202020204" pitchFamily="34" charset="0"/>
             </a:endParaRPr>
@@ -5610,167 +5692,181 @@
               </a:lnSpc>
             </a:pPr>
             <a:r>
-              <a:rPr sz="2400" spc="15" dirty="0">
+              <a:rPr sz="2800" spc="15" dirty="0">
                 <a:latin typeface="Arial" panose="020B0604020202020204" pitchFamily="34" charset="0"/>
                 <a:cs typeface="Arial" panose="020B0604020202020204" pitchFamily="34" charset="0"/>
               </a:rPr>
               <a:t>Если</a:t>
             </a:r>
             <a:r>
-              <a:rPr sz="2400" spc="10" dirty="0">
-                <a:latin typeface="Arial" panose="020B0604020202020204" pitchFamily="34" charset="0"/>
-                <a:cs typeface="Arial" panose="020B0604020202020204" pitchFamily="34" charset="0"/>
-              </a:rPr>
-              <a:t> </a:t>
-            </a:r>
-            <a:r>
-              <a:rPr sz="2400" spc="15" dirty="0">
+              <a:rPr sz="2800" spc="10" dirty="0">
+                <a:latin typeface="Arial" panose="020B0604020202020204" pitchFamily="34" charset="0"/>
+                <a:cs typeface="Arial" panose="020B0604020202020204" pitchFamily="34" charset="0"/>
+              </a:rPr>
+              <a:t> </a:t>
+            </a:r>
+            <a:r>
+              <a:rPr sz="2800" spc="15" dirty="0">
                 <a:latin typeface="Arial" panose="020B0604020202020204" pitchFamily="34" charset="0"/>
                 <a:cs typeface="Arial" panose="020B0604020202020204" pitchFamily="34" charset="0"/>
               </a:rPr>
               <a:t>есть</a:t>
             </a:r>
             <a:r>
-              <a:rPr sz="2400" spc="10" dirty="0">
-                <a:latin typeface="Arial" panose="020B0604020202020204" pitchFamily="34" charset="0"/>
-                <a:cs typeface="Arial" panose="020B0604020202020204" pitchFamily="34" charset="0"/>
-              </a:rPr>
-              <a:t> </a:t>
-            </a:r>
-            <a:r>
-              <a:rPr sz="2400" spc="15" dirty="0">
+              <a:rPr sz="2800" spc="10" dirty="0">
+                <a:latin typeface="Arial" panose="020B0604020202020204" pitchFamily="34" charset="0"/>
+                <a:cs typeface="Arial" panose="020B0604020202020204" pitchFamily="34" charset="0"/>
+              </a:rPr>
+              <a:t> </a:t>
+            </a:r>
+            <a:r>
+              <a:rPr sz="2800" spc="15" dirty="0">
                 <a:latin typeface="Arial" panose="020B0604020202020204" pitchFamily="34" charset="0"/>
                 <a:cs typeface="Arial" panose="020B0604020202020204" pitchFamily="34" charset="0"/>
               </a:rPr>
               <a:t>флаг</a:t>
             </a:r>
             <a:r>
-              <a:rPr sz="2400" spc="10" dirty="0">
-                <a:latin typeface="Arial" panose="020B0604020202020204" pitchFamily="34" charset="0"/>
-                <a:cs typeface="Arial" panose="020B0604020202020204" pitchFamily="34" charset="0"/>
-              </a:rPr>
-              <a:t> </a:t>
-            </a:r>
-            <a:r>
-              <a:rPr sz="2400" spc="15" dirty="0">
+              <a:rPr sz="2800" spc="10" dirty="0">
+                <a:latin typeface="Arial" panose="020B0604020202020204" pitchFamily="34" charset="0"/>
+                <a:cs typeface="Arial" panose="020B0604020202020204" pitchFamily="34" charset="0"/>
+              </a:rPr>
+              <a:t> </a:t>
+            </a:r>
+            <a:r>
+              <a:rPr sz="2800" spc="15" dirty="0">
                 <a:latin typeface="Arial" panose="020B0604020202020204" pitchFamily="34" charset="0"/>
                 <a:cs typeface="Arial" panose="020B0604020202020204" pitchFamily="34" charset="0"/>
               </a:rPr>
               <a:t>O_CREAT</a:t>
             </a:r>
             <a:r>
-              <a:rPr sz="2400" spc="10" dirty="0">
-                <a:latin typeface="Arial" panose="020B0604020202020204" pitchFamily="34" charset="0"/>
-                <a:cs typeface="Arial" panose="020B0604020202020204" pitchFamily="34" charset="0"/>
-              </a:rPr>
-              <a:t> </a:t>
-            </a:r>
-            <a:r>
-              <a:rPr sz="2400" spc="15" dirty="0">
+              <a:rPr sz="2800" spc="10" dirty="0">
+                <a:latin typeface="Arial" panose="020B0604020202020204" pitchFamily="34" charset="0"/>
+                <a:cs typeface="Arial" panose="020B0604020202020204" pitchFamily="34" charset="0"/>
+              </a:rPr>
+              <a:t> </a:t>
+            </a:r>
+            <a:r>
+              <a:rPr sz="2800" spc="15" dirty="0">
                 <a:latin typeface="Arial" panose="020B0604020202020204" pitchFamily="34" charset="0"/>
                 <a:cs typeface="Arial" panose="020B0604020202020204" pitchFamily="34" charset="0"/>
               </a:rPr>
               <a:t>или</a:t>
             </a:r>
             <a:r>
-              <a:rPr sz="2400" spc="10" dirty="0">
-                <a:latin typeface="Arial" panose="020B0604020202020204" pitchFamily="34" charset="0"/>
-                <a:cs typeface="Arial" panose="020B0604020202020204" pitchFamily="34" charset="0"/>
-              </a:rPr>
-              <a:t> </a:t>
-            </a:r>
-            <a:r>
-              <a:rPr sz="2400" spc="15" dirty="0">
+              <a:rPr sz="2800" spc="10" dirty="0">
+                <a:latin typeface="Arial" panose="020B0604020202020204" pitchFamily="34" charset="0"/>
+                <a:cs typeface="Arial" panose="020B0604020202020204" pitchFamily="34" charset="0"/>
+              </a:rPr>
+              <a:t> </a:t>
+            </a:r>
+            <a:r>
+              <a:rPr sz="2800" spc="15" dirty="0">
                 <a:latin typeface="Arial" panose="020B0604020202020204" pitchFamily="34" charset="0"/>
                 <a:cs typeface="Arial" panose="020B0604020202020204" pitchFamily="34" charset="0"/>
               </a:rPr>
               <a:t>O_TMPFILE,</a:t>
             </a:r>
             <a:r>
-              <a:rPr sz="2400" spc="10" dirty="0">
-                <a:latin typeface="Arial" panose="020B0604020202020204" pitchFamily="34" charset="0"/>
-                <a:cs typeface="Arial" panose="020B0604020202020204" pitchFamily="34" charset="0"/>
-              </a:rPr>
-              <a:t> </a:t>
-            </a:r>
-            <a:r>
-              <a:rPr sz="2400" spc="15" dirty="0">
+              <a:rPr sz="2800" spc="10" dirty="0">
+                <a:latin typeface="Arial" panose="020B0604020202020204" pitchFamily="34" charset="0"/>
+                <a:cs typeface="Arial" panose="020B0604020202020204" pitchFamily="34" charset="0"/>
+              </a:rPr>
+              <a:t> </a:t>
+            </a:r>
+            <a:r>
+              <a:rPr sz="2800" spc="15" dirty="0">
                 <a:latin typeface="Arial" panose="020B0604020202020204" pitchFamily="34" charset="0"/>
                 <a:cs typeface="Arial" panose="020B0604020202020204" pitchFamily="34" charset="0"/>
               </a:rPr>
               <a:t>то</a:t>
             </a:r>
             <a:r>
-              <a:rPr sz="2400" spc="10" dirty="0">
-                <a:latin typeface="Arial" panose="020B0604020202020204" pitchFamily="34" charset="0"/>
-                <a:cs typeface="Arial" panose="020B0604020202020204" pitchFamily="34" charset="0"/>
-              </a:rPr>
-              <a:t> </a:t>
-            </a:r>
-            <a:r>
-              <a:rPr sz="2400" spc="15" dirty="0">
+              <a:rPr sz="2800" spc="10" dirty="0">
+                <a:latin typeface="Arial" panose="020B0604020202020204" pitchFamily="34" charset="0"/>
+                <a:cs typeface="Arial" panose="020B0604020202020204" pitchFamily="34" charset="0"/>
+              </a:rPr>
+              <a:t> </a:t>
+            </a:r>
+            <a:r>
+              <a:rPr sz="2800" spc="15" dirty="0">
                 <a:latin typeface="Arial" panose="020B0604020202020204" pitchFamily="34" charset="0"/>
                 <a:cs typeface="Arial" panose="020B0604020202020204" pitchFamily="34" charset="0"/>
               </a:rPr>
               <a:t>должен</a:t>
             </a:r>
             <a:r>
-              <a:rPr sz="2400" spc="10" dirty="0">
-                <a:latin typeface="Arial" panose="020B0604020202020204" pitchFamily="34" charset="0"/>
-                <a:cs typeface="Arial" panose="020B0604020202020204" pitchFamily="34" charset="0"/>
-              </a:rPr>
-              <a:t> </a:t>
-            </a:r>
-            <a:r>
-              <a:rPr sz="2400" spc="15" dirty="0">
+              <a:rPr sz="2800" spc="10" dirty="0">
+                <a:latin typeface="Arial" panose="020B0604020202020204" pitchFamily="34" charset="0"/>
+                <a:cs typeface="Arial" panose="020B0604020202020204" pitchFamily="34" charset="0"/>
+              </a:rPr>
+              <a:t> </a:t>
+            </a:r>
+            <a:r>
+              <a:rPr sz="2800" spc="15" dirty="0">
                 <a:latin typeface="Arial" panose="020B0604020202020204" pitchFamily="34" charset="0"/>
                 <a:cs typeface="Arial" panose="020B0604020202020204" pitchFamily="34" charset="0"/>
               </a:rPr>
               <a:t>быть</a:t>
             </a:r>
             <a:r>
-              <a:rPr sz="2400" spc="10" dirty="0">
-                <a:latin typeface="Arial" panose="020B0604020202020204" pitchFamily="34" charset="0"/>
-                <a:cs typeface="Arial" panose="020B0604020202020204" pitchFamily="34" charset="0"/>
-              </a:rPr>
-              <a:t> </a:t>
-            </a:r>
-            <a:r>
-              <a:rPr sz="2400" spc="15" dirty="0">
+              <a:rPr sz="2800" spc="10" dirty="0">
+                <a:latin typeface="Arial" panose="020B0604020202020204" pitchFamily="34" charset="0"/>
+                <a:cs typeface="Arial" panose="020B0604020202020204" pitchFamily="34" charset="0"/>
+              </a:rPr>
+              <a:t> </a:t>
+            </a:r>
+            <a:r>
+              <a:rPr sz="2800" spc="15" dirty="0">
                 <a:latin typeface="Arial" panose="020B0604020202020204" pitchFamily="34" charset="0"/>
                 <a:cs typeface="Arial" panose="020B0604020202020204" pitchFamily="34" charset="0"/>
               </a:rPr>
               <a:t>mode</a:t>
             </a:r>
             <a:r>
-              <a:rPr sz="2400" spc="10" dirty="0">
-                <a:latin typeface="Arial" panose="020B0604020202020204" pitchFamily="34" charset="0"/>
-                <a:cs typeface="Arial" panose="020B0604020202020204" pitchFamily="34" charset="0"/>
-              </a:rPr>
-              <a:t> </a:t>
-            </a:r>
-            <a:r>
-              <a:rPr sz="2400" spc="15" dirty="0">
-                <a:latin typeface="Arial" panose="020B0604020202020204" pitchFamily="34" charset="0"/>
-                <a:cs typeface="Arial" panose="020B0604020202020204" pitchFamily="34" charset="0"/>
-              </a:rPr>
-              <a:t>(z.B.</a:t>
-            </a:r>
-            <a:r>
-              <a:rPr sz="2400" spc="10" dirty="0">
-                <a:latin typeface="Arial" panose="020B0604020202020204" pitchFamily="34" charset="0"/>
-                <a:cs typeface="Arial" panose="020B0604020202020204" pitchFamily="34" charset="0"/>
-              </a:rPr>
-              <a:t> </a:t>
-            </a:r>
-            <a:r>
-              <a:rPr sz="2400" spc="15" dirty="0">
+              <a:rPr sz="2800" spc="10" dirty="0">
+                <a:latin typeface="Arial" panose="020B0604020202020204" pitchFamily="34" charset="0"/>
+                <a:cs typeface="Arial" panose="020B0604020202020204" pitchFamily="34" charset="0"/>
+              </a:rPr>
+              <a:t> </a:t>
+            </a:r>
+            <a:r>
+              <a:rPr sz="2800" spc="15" dirty="0">
+                <a:latin typeface="Arial" panose="020B0604020202020204" pitchFamily="34" charset="0"/>
+                <a:cs typeface="Arial" panose="020B0604020202020204" pitchFamily="34" charset="0"/>
+              </a:rPr>
+              <a:t>(</a:t>
+            </a:r>
+            <a:r>
+              <a:rPr lang="en-US" sz="2800" spc="15" dirty="0">
+                <a:latin typeface="Arial" panose="020B0604020202020204" pitchFamily="34" charset="0"/>
+                <a:cs typeface="Arial" panose="020B0604020202020204" pitchFamily="34" charset="0"/>
+              </a:rPr>
+              <a:t>e.g</a:t>
+            </a:r>
+            <a:r>
+              <a:rPr sz="2800" spc="15" dirty="0">
+                <a:latin typeface="Arial" panose="020B0604020202020204" pitchFamily="34" charset="0"/>
+                <a:cs typeface="Arial" panose="020B0604020202020204" pitchFamily="34" charset="0"/>
+              </a:rPr>
+              <a:t>.</a:t>
+            </a:r>
+            <a:r>
+              <a:rPr sz="2800" spc="10" dirty="0">
+                <a:latin typeface="Arial" panose="020B0604020202020204" pitchFamily="34" charset="0"/>
+                <a:cs typeface="Arial" panose="020B0604020202020204" pitchFamily="34" charset="0"/>
+              </a:rPr>
+              <a:t> </a:t>
+            </a:r>
+            <a:r>
+              <a:rPr sz="2800" spc="15" dirty="0">
                 <a:latin typeface="Arial" panose="020B0604020202020204" pitchFamily="34" charset="0"/>
                 <a:cs typeface="Arial" panose="020B0604020202020204" pitchFamily="34" charset="0"/>
               </a:rPr>
               <a:t>0642)</a:t>
             </a:r>
-            <a:endParaRPr sz="2400" dirty="0">
+            <a:endParaRPr sz="2800" dirty="0">
               <a:latin typeface="Arial" panose="020B0604020202020204" pitchFamily="34" charset="0"/>
               <a:cs typeface="Arial" panose="020B0604020202020204" pitchFamily="34" charset="0"/>
             </a:endParaRPr>
@@ -5782,27 +5878,27 @@
               </a:lnSpc>
             </a:pPr>
             <a:r>
-              <a:rPr sz="2400" b="1" spc="15" dirty="0">
+              <a:rPr sz="2800" b="1" spc="15" dirty="0">
                 <a:latin typeface="Arial" panose="020B0604020202020204" pitchFamily="34" charset="0"/>
                 <a:cs typeface="Arial" panose="020B0604020202020204" pitchFamily="34" charset="0"/>
               </a:rPr>
               <a:t>Return</a:t>
             </a:r>
             <a:r>
-              <a:rPr sz="2400" b="1" spc="-45" dirty="0">
-                <a:latin typeface="Arial" panose="020B0604020202020204" pitchFamily="34" charset="0"/>
-                <a:cs typeface="Arial" panose="020B0604020202020204" pitchFamily="34" charset="0"/>
-              </a:rPr>
-              <a:t> </a:t>
-            </a:r>
-            <a:r>
-              <a:rPr sz="2400" b="1" spc="15" dirty="0">
+              <a:rPr sz="2800" b="1" spc="-45" dirty="0">
+                <a:latin typeface="Arial" panose="020B0604020202020204" pitchFamily="34" charset="0"/>
+                <a:cs typeface="Arial" panose="020B0604020202020204" pitchFamily="34" charset="0"/>
+              </a:rPr>
+              <a:t> </a:t>
+            </a:r>
+            <a:r>
+              <a:rPr sz="2800" b="1" spc="15" dirty="0">
                 <a:latin typeface="Arial" panose="020B0604020202020204" pitchFamily="34" charset="0"/>
                 <a:cs typeface="Arial" panose="020B0604020202020204" pitchFamily="34" charset="0"/>
               </a:rPr>
               <a:t>value:</a:t>
             </a:r>
-            <a:endParaRPr sz="2400" dirty="0">
+            <a:endParaRPr sz="2800" dirty="0">
               <a:latin typeface="Arial" panose="020B0604020202020204" pitchFamily="34" charset="0"/>
               <a:cs typeface="Arial" panose="020B0604020202020204" pitchFamily="34" charset="0"/>
             </a:endParaRPr>
@@ -5814,83 +5910,83 @@
               </a:lnSpc>
             </a:pPr>
             <a:r>
-              <a:rPr sz="2400" b="1" spc="15" dirty="0">
+              <a:rPr sz="2800" b="1" spc="15" dirty="0">
                 <a:latin typeface="Arial" panose="020B0604020202020204" pitchFamily="34" charset="0"/>
                 <a:cs typeface="Arial" panose="020B0604020202020204" pitchFamily="34" charset="0"/>
               </a:rPr>
               <a:t>fd</a:t>
             </a:r>
             <a:r>
-              <a:rPr sz="2400" b="1" dirty="0">
-                <a:latin typeface="Arial" panose="020B0604020202020204" pitchFamily="34" charset="0"/>
-                <a:cs typeface="Arial" panose="020B0604020202020204" pitchFamily="34" charset="0"/>
-              </a:rPr>
-              <a:t> </a:t>
-            </a:r>
-            <a:r>
-              <a:rPr sz="2400" spc="15" dirty="0">
+              <a:rPr sz="2800" b="1" dirty="0">
+                <a:latin typeface="Arial" panose="020B0604020202020204" pitchFamily="34" charset="0"/>
+                <a:cs typeface="Arial" panose="020B0604020202020204" pitchFamily="34" charset="0"/>
+              </a:rPr>
+              <a:t> </a:t>
+            </a:r>
+            <a:r>
+              <a:rPr sz="2800" spc="15" dirty="0">
                 <a:latin typeface="Arial" panose="020B0604020202020204" pitchFamily="34" charset="0"/>
                 <a:cs typeface="Arial" panose="020B0604020202020204" pitchFamily="34" charset="0"/>
               </a:rPr>
               <a:t>или</a:t>
             </a:r>
             <a:r>
-              <a:rPr sz="2400" dirty="0">
-                <a:latin typeface="Arial" panose="020B0604020202020204" pitchFamily="34" charset="0"/>
-                <a:cs typeface="Arial" panose="020B0604020202020204" pitchFamily="34" charset="0"/>
-              </a:rPr>
-              <a:t> </a:t>
-            </a:r>
-            <a:r>
-              <a:rPr sz="2400" b="1" spc="15" dirty="0">
+              <a:rPr sz="2800" dirty="0">
+                <a:latin typeface="Arial" panose="020B0604020202020204" pitchFamily="34" charset="0"/>
+                <a:cs typeface="Arial" panose="020B0604020202020204" pitchFamily="34" charset="0"/>
+              </a:rPr>
+              <a:t> </a:t>
+            </a:r>
+            <a:r>
+              <a:rPr sz="2800" b="1" spc="15" dirty="0">
                 <a:latin typeface="Arial" panose="020B0604020202020204" pitchFamily="34" charset="0"/>
                 <a:cs typeface="Arial" panose="020B0604020202020204" pitchFamily="34" charset="0"/>
               </a:rPr>
               <a:t>-1</a:t>
             </a:r>
             <a:r>
-              <a:rPr sz="2400" b="1" dirty="0">
-                <a:latin typeface="Arial" panose="020B0604020202020204" pitchFamily="34" charset="0"/>
-                <a:cs typeface="Arial" panose="020B0604020202020204" pitchFamily="34" charset="0"/>
-              </a:rPr>
-              <a:t> </a:t>
-            </a:r>
-            <a:r>
-              <a:rPr sz="2400" spc="15" dirty="0">
+              <a:rPr sz="2800" b="1" dirty="0">
+                <a:latin typeface="Arial" panose="020B0604020202020204" pitchFamily="34" charset="0"/>
+                <a:cs typeface="Arial" panose="020B0604020202020204" pitchFamily="34" charset="0"/>
+              </a:rPr>
+              <a:t> </a:t>
+            </a:r>
+            <a:r>
+              <a:rPr sz="2800" spc="15" dirty="0">
                 <a:latin typeface="Arial" panose="020B0604020202020204" pitchFamily="34" charset="0"/>
                 <a:cs typeface="Arial" panose="020B0604020202020204" pitchFamily="34" charset="0"/>
               </a:rPr>
               <a:t>и</a:t>
             </a:r>
             <a:r>
-              <a:rPr sz="2400" dirty="0">
-                <a:latin typeface="Arial" panose="020B0604020202020204" pitchFamily="34" charset="0"/>
-                <a:cs typeface="Arial" panose="020B0604020202020204" pitchFamily="34" charset="0"/>
-              </a:rPr>
-              <a:t> </a:t>
-            </a:r>
-            <a:r>
-              <a:rPr sz="2400" spc="15" dirty="0">
+              <a:rPr sz="2800" dirty="0">
+                <a:latin typeface="Arial" panose="020B0604020202020204" pitchFamily="34" charset="0"/>
+                <a:cs typeface="Arial" panose="020B0604020202020204" pitchFamily="34" charset="0"/>
+              </a:rPr>
+              <a:t> </a:t>
+            </a:r>
+            <a:r>
+              <a:rPr sz="2800" spc="15" dirty="0">
                 <a:latin typeface="Arial" panose="020B0604020202020204" pitchFamily="34" charset="0"/>
                 <a:cs typeface="Arial" panose="020B0604020202020204" pitchFamily="34" charset="0"/>
               </a:rPr>
               <a:t>выставляется</a:t>
             </a:r>
             <a:r>
-              <a:rPr sz="2400" dirty="0">
-                <a:latin typeface="Arial" panose="020B0604020202020204" pitchFamily="34" charset="0"/>
-                <a:cs typeface="Arial" panose="020B0604020202020204" pitchFamily="34" charset="0"/>
-              </a:rPr>
-              <a:t> </a:t>
-            </a:r>
-            <a:r>
-              <a:rPr sz="2400" spc="15" dirty="0">
+              <a:rPr sz="2800" dirty="0">
+                <a:latin typeface="Arial" panose="020B0604020202020204" pitchFamily="34" charset="0"/>
+                <a:cs typeface="Arial" panose="020B0604020202020204" pitchFamily="34" charset="0"/>
+              </a:rPr>
+              <a:t> </a:t>
+            </a:r>
+            <a:r>
+              <a:rPr sz="2800" spc="15" dirty="0">
                 <a:latin typeface="Arial" panose="020B0604020202020204" pitchFamily="34" charset="0"/>
                 <a:cs typeface="Arial" panose="020B0604020202020204" pitchFamily="34" charset="0"/>
               </a:rPr>
               <a:t>errno</a:t>
             </a:r>
-            <a:endParaRPr sz="2400" dirty="0">
+            <a:endParaRPr sz="2800" dirty="0">
               <a:latin typeface="Arial" panose="020B0604020202020204" pitchFamily="34" charset="0"/>
               <a:cs typeface="Arial" panose="020B0604020202020204" pitchFamily="34" charset="0"/>
             </a:endParaRPr>
@@ -5904,7 +6000,7 @@
                 <a:spcPts val="25"/>
               </a:spcBef>
             </a:pPr>
-            <a:endParaRPr sz="2400" dirty="0">
+            <a:endParaRPr sz="2800" dirty="0">
               <a:latin typeface="Arial" panose="020B0604020202020204" pitchFamily="34" charset="0"/>
               <a:cs typeface="Arial" panose="020B0604020202020204" pitchFamily="34" charset="0"/>
             </a:endParaRPr>
@@ -5919,13 +6015,20 @@
               </a:spcBef>
             </a:pPr>
             <a:r>
-              <a:rPr sz="2400" spc="15" dirty="0">
-                <a:latin typeface="Arial" panose="020B0604020202020204" pitchFamily="34" charset="0"/>
-                <a:cs typeface="Arial" panose="020B0604020202020204" pitchFamily="34" charset="0"/>
-              </a:rPr>
-              <a:t>z.B.:</a:t>
-            </a:r>
-            <a:endParaRPr sz="2400" dirty="0">
+              <a:rPr lang="en-US" sz="2800" spc="15" dirty="0">
+                <a:latin typeface="Arial" panose="020B0604020202020204" pitchFamily="34" charset="0"/>
+                <a:cs typeface="Arial" panose="020B0604020202020204" pitchFamily="34" charset="0"/>
+              </a:rPr>
+              <a:t>e.g</a:t>
+            </a:r>
+            <a:r>
+              <a:rPr sz="2800" spc="15" dirty="0">
+                <a:latin typeface="Arial" panose="020B0604020202020204" pitchFamily="34" charset="0"/>
+                <a:cs typeface="Arial" panose="020B0604020202020204" pitchFamily="34" charset="0"/>
+              </a:rPr>
+              <a:t>.:</a:t>
+            </a:r>
+            <a:endParaRPr sz="2800" dirty="0">
               <a:latin typeface="Arial" panose="020B0604020202020204" pitchFamily="34" charset="0"/>
               <a:cs typeface="Arial" panose="020B0604020202020204" pitchFamily="34" charset="0"/>
             </a:endParaRPr>
@@ -5937,97 +6040,97 @@
               </a:lnSpc>
             </a:pPr>
             <a:r>
-              <a:rPr sz="2400" spc="15" dirty="0">
+              <a:rPr sz="2800" spc="15" dirty="0">
                 <a:latin typeface="Arial" panose="020B0604020202020204" pitchFamily="34" charset="0"/>
                 <a:cs typeface="Arial" panose="020B0604020202020204" pitchFamily="34" charset="0"/>
               </a:rPr>
               <a:t>open(“main.c”,</a:t>
             </a:r>
             <a:r>
-              <a:rPr sz="2400" spc="5" dirty="0">
-                <a:latin typeface="Arial" panose="020B0604020202020204" pitchFamily="34" charset="0"/>
-                <a:cs typeface="Arial" panose="020B0604020202020204" pitchFamily="34" charset="0"/>
-              </a:rPr>
-              <a:t> </a:t>
-            </a:r>
-            <a:r>
-              <a:rPr sz="2400" spc="15" dirty="0">
+              <a:rPr sz="2800" spc="5" dirty="0">
+                <a:latin typeface="Arial" panose="020B0604020202020204" pitchFamily="34" charset="0"/>
+                <a:cs typeface="Arial" panose="020B0604020202020204" pitchFamily="34" charset="0"/>
+              </a:rPr>
+              <a:t> </a:t>
+            </a:r>
+            <a:r>
+              <a:rPr sz="2800" spc="15" dirty="0">
                 <a:latin typeface="Arial" panose="020B0604020202020204" pitchFamily="34" charset="0"/>
                 <a:cs typeface="Arial" panose="020B0604020202020204" pitchFamily="34" charset="0"/>
               </a:rPr>
               <a:t>O_RDWR</a:t>
             </a:r>
             <a:r>
-              <a:rPr sz="2400" spc="5" dirty="0">
-                <a:latin typeface="Arial" panose="020B0604020202020204" pitchFamily="34" charset="0"/>
-                <a:cs typeface="Arial" panose="020B0604020202020204" pitchFamily="34" charset="0"/>
-              </a:rPr>
-              <a:t> </a:t>
-            </a:r>
-            <a:r>
-              <a:rPr sz="2400" spc="15" dirty="0">
+              <a:rPr sz="2800" spc="5" dirty="0">
+                <a:latin typeface="Arial" panose="020B0604020202020204" pitchFamily="34" charset="0"/>
+                <a:cs typeface="Arial" panose="020B0604020202020204" pitchFamily="34" charset="0"/>
+              </a:rPr>
+              <a:t> </a:t>
+            </a:r>
+            <a:r>
+              <a:rPr sz="2800" spc="15" dirty="0">
                 <a:latin typeface="Arial" panose="020B0604020202020204" pitchFamily="34" charset="0"/>
                 <a:cs typeface="Arial" panose="020B0604020202020204" pitchFamily="34" charset="0"/>
               </a:rPr>
               <a:t>|</a:t>
             </a:r>
             <a:r>
-              <a:rPr sz="2400" spc="5" dirty="0">
-                <a:latin typeface="Arial" panose="020B0604020202020204" pitchFamily="34" charset="0"/>
-                <a:cs typeface="Arial" panose="020B0604020202020204" pitchFamily="34" charset="0"/>
-              </a:rPr>
-              <a:t> </a:t>
-            </a:r>
-            <a:r>
-              <a:rPr sz="2400" spc="15" dirty="0">
+              <a:rPr sz="2800" spc="5" dirty="0">
+                <a:latin typeface="Arial" panose="020B0604020202020204" pitchFamily="34" charset="0"/>
+                <a:cs typeface="Arial" panose="020B0604020202020204" pitchFamily="34" charset="0"/>
+              </a:rPr>
+              <a:t> </a:t>
+            </a:r>
+            <a:r>
+              <a:rPr sz="2800" spc="15" dirty="0">
                 <a:latin typeface="Arial" panose="020B0604020202020204" pitchFamily="34" charset="0"/>
                 <a:cs typeface="Arial" panose="020B0604020202020204" pitchFamily="34" charset="0"/>
               </a:rPr>
               <a:t>O_CREAT,</a:t>
             </a:r>
             <a:r>
-              <a:rPr sz="2400" spc="5" dirty="0">
-                <a:latin typeface="Arial" panose="020B0604020202020204" pitchFamily="34" charset="0"/>
-                <a:cs typeface="Arial" panose="020B0604020202020204" pitchFamily="34" charset="0"/>
-              </a:rPr>
-              <a:t> </a:t>
-            </a:r>
-            <a:r>
-              <a:rPr sz="2400" spc="15" dirty="0">
+              <a:rPr sz="2800" spc="5" dirty="0">
+                <a:latin typeface="Arial" panose="020B0604020202020204" pitchFamily="34" charset="0"/>
+                <a:cs typeface="Arial" panose="020B0604020202020204" pitchFamily="34" charset="0"/>
+              </a:rPr>
+              <a:t> </a:t>
+            </a:r>
+            <a:r>
+              <a:rPr sz="2800" spc="15" dirty="0">
                 <a:latin typeface="Arial" panose="020B0604020202020204" pitchFamily="34" charset="0"/>
                 <a:cs typeface="Arial" panose="020B0604020202020204" pitchFamily="34" charset="0"/>
               </a:rPr>
               <a:t>S_IRWXU</a:t>
             </a:r>
             <a:r>
-              <a:rPr sz="2400" spc="5" dirty="0">
-                <a:latin typeface="Arial" panose="020B0604020202020204" pitchFamily="34" charset="0"/>
-                <a:cs typeface="Arial" panose="020B0604020202020204" pitchFamily="34" charset="0"/>
-              </a:rPr>
-              <a:t> </a:t>
-            </a:r>
-            <a:r>
-              <a:rPr sz="2400" spc="15" dirty="0">
+              <a:rPr sz="2800" spc="5" dirty="0">
+                <a:latin typeface="Arial" panose="020B0604020202020204" pitchFamily="34" charset="0"/>
+                <a:cs typeface="Arial" panose="020B0604020202020204" pitchFamily="34" charset="0"/>
+              </a:rPr>
+              <a:t> </a:t>
+            </a:r>
+            <a:r>
+              <a:rPr sz="2800" spc="15" dirty="0">
                 <a:latin typeface="Arial" panose="020B0604020202020204" pitchFamily="34" charset="0"/>
                 <a:cs typeface="Arial" panose="020B0604020202020204" pitchFamily="34" charset="0"/>
               </a:rPr>
               <a:t>|</a:t>
             </a:r>
             <a:r>
-              <a:rPr sz="2400" spc="5" dirty="0">
-                <a:latin typeface="Arial" panose="020B0604020202020204" pitchFamily="34" charset="0"/>
-                <a:cs typeface="Arial" panose="020B0604020202020204" pitchFamily="34" charset="0"/>
-              </a:rPr>
-              <a:t> </a:t>
-            </a:r>
-            <a:r>
-              <a:rPr sz="2400" spc="15" dirty="0">
+              <a:rPr sz="2800" spc="5" dirty="0">
+                <a:latin typeface="Arial" panose="020B0604020202020204" pitchFamily="34" charset="0"/>
+                <a:cs typeface="Arial" panose="020B0604020202020204" pitchFamily="34" charset="0"/>
+              </a:rPr>
+              <a:t> </a:t>
+            </a:r>
+            <a:r>
+              <a:rPr sz="2800" spc="15" dirty="0">
                 <a:latin typeface="Arial" panose="020B0604020202020204" pitchFamily="34" charset="0"/>
                 <a:cs typeface="Arial" panose="020B0604020202020204" pitchFamily="34" charset="0"/>
               </a:rPr>
               <a:t>S_IRWXG);</a:t>
             </a:r>
-            <a:endParaRPr sz="2400" dirty="0">
+            <a:endParaRPr sz="2800" dirty="0">
               <a:latin typeface="Arial" panose="020B0604020202020204" pitchFamily="34" charset="0"/>
               <a:cs typeface="Arial" panose="020B0604020202020204" pitchFamily="34" charset="0"/>
             </a:endParaRPr>
@@ -6041,7 +6144,7 @@
                 <a:spcPts val="25"/>
               </a:spcBef>
             </a:pPr>
-            <a:endParaRPr sz="2400" dirty="0">
+            <a:endParaRPr sz="2800" dirty="0">
               <a:latin typeface="Arial" panose="020B0604020202020204" pitchFamily="34" charset="0"/>
               <a:cs typeface="Arial" panose="020B0604020202020204" pitchFamily="34" charset="0"/>
             </a:endParaRPr>
@@ -6053,56 +6156,56 @@
               </a:lnSpc>
             </a:pPr>
             <a:r>
-              <a:rPr sz="2400" b="1" spc="15" dirty="0">
+              <a:rPr sz="2800" b="1" spc="15" dirty="0">
                 <a:latin typeface="Arial" panose="020B0604020202020204" pitchFamily="34" charset="0"/>
                 <a:cs typeface="Arial" panose="020B0604020202020204" pitchFamily="34" charset="0"/>
               </a:rPr>
               <a:t>int</a:t>
             </a:r>
             <a:r>
-              <a:rPr sz="2400" b="1" dirty="0">
-                <a:latin typeface="Arial" panose="020B0604020202020204" pitchFamily="34" charset="0"/>
-                <a:cs typeface="Arial" panose="020B0604020202020204" pitchFamily="34" charset="0"/>
-              </a:rPr>
-              <a:t> </a:t>
-            </a:r>
-            <a:r>
-              <a:rPr sz="2400" b="1" spc="15" dirty="0">
+              <a:rPr sz="2800" b="1" dirty="0">
+                <a:latin typeface="Arial" panose="020B0604020202020204" pitchFamily="34" charset="0"/>
+                <a:cs typeface="Arial" panose="020B0604020202020204" pitchFamily="34" charset="0"/>
+              </a:rPr>
+              <a:t> </a:t>
+            </a:r>
+            <a:r>
+              <a:rPr sz="2800" b="1" spc="15" dirty="0">
                 <a:latin typeface="Arial" panose="020B0604020202020204" pitchFamily="34" charset="0"/>
                 <a:cs typeface="Arial" panose="020B0604020202020204" pitchFamily="34" charset="0"/>
               </a:rPr>
               <a:t>creat(const</a:t>
             </a:r>
             <a:r>
-              <a:rPr sz="2400" b="1" spc="-5" dirty="0">
-                <a:latin typeface="Arial" panose="020B0604020202020204" pitchFamily="34" charset="0"/>
-                <a:cs typeface="Arial" panose="020B0604020202020204" pitchFamily="34" charset="0"/>
-              </a:rPr>
-              <a:t> </a:t>
-            </a:r>
-            <a:r>
-              <a:rPr sz="2400" b="1" spc="15" dirty="0">
+              <a:rPr sz="2800" b="1" spc="-5" dirty="0">
+                <a:latin typeface="Arial" panose="020B0604020202020204" pitchFamily="34" charset="0"/>
+                <a:cs typeface="Arial" panose="020B0604020202020204" pitchFamily="34" charset="0"/>
+              </a:rPr>
+              <a:t> </a:t>
+            </a:r>
+            <a:r>
+              <a:rPr sz="2800" b="1" spc="15" dirty="0">
                 <a:latin typeface="Arial" panose="020B0604020202020204" pitchFamily="34" charset="0"/>
                 <a:cs typeface="Arial" panose="020B0604020202020204" pitchFamily="34" charset="0"/>
               </a:rPr>
               <a:t>char</a:t>
             </a:r>
             <a:r>
-              <a:rPr sz="2400" b="1" dirty="0">
-                <a:latin typeface="Arial" panose="020B0604020202020204" pitchFamily="34" charset="0"/>
-                <a:cs typeface="Arial" panose="020B0604020202020204" pitchFamily="34" charset="0"/>
-              </a:rPr>
-              <a:t> </a:t>
-            </a:r>
-            <a:r>
-              <a:rPr sz="2400" b="1" spc="15" dirty="0">
+              <a:rPr sz="2800" b="1" dirty="0">
+                <a:latin typeface="Arial" panose="020B0604020202020204" pitchFamily="34" charset="0"/>
+                <a:cs typeface="Arial" panose="020B0604020202020204" pitchFamily="34" charset="0"/>
+              </a:rPr>
+              <a:t> </a:t>
+            </a:r>
+            <a:r>
+              <a:rPr sz="2800" b="1" spc="15" dirty="0">
                 <a:latin typeface="Arial" panose="020B0604020202020204" pitchFamily="34" charset="0"/>
                 <a:cs typeface="Arial" panose="020B0604020202020204" pitchFamily="34" charset="0"/>
               </a:rPr>
               <a:t>*</a:t>
             </a:r>
             <a:r>
-              <a:rPr sz="2400" u="sng" spc="15" dirty="0">
+              <a:rPr sz="2800" u="sng" spc="15" dirty="0">
                 <a:uFill>
                   <a:solidFill>
                     <a:srgbClr val="000000"/>
@@ -6114,35 +6217,35 @@
               <a:t>pathname</a:t>
             </a:r>
             <a:r>
-              <a:rPr sz="2400" b="1" spc="15" dirty="0">
+              <a:rPr sz="2800" b="1" spc="15" dirty="0">
                 <a:latin typeface="Arial" panose="020B0604020202020204" pitchFamily="34" charset="0"/>
                 <a:cs typeface="Arial" panose="020B0604020202020204" pitchFamily="34" charset="0"/>
               </a:rPr>
               <a:t>,</a:t>
             </a:r>
             <a:r>
-              <a:rPr sz="2400" b="1" dirty="0">
-                <a:latin typeface="Arial" panose="020B0604020202020204" pitchFamily="34" charset="0"/>
-                <a:cs typeface="Arial" panose="020B0604020202020204" pitchFamily="34" charset="0"/>
-              </a:rPr>
-              <a:t> </a:t>
-            </a:r>
-            <a:r>
-              <a:rPr sz="2400" b="1" spc="15" dirty="0">
+              <a:rPr sz="2800" b="1" dirty="0">
+                <a:latin typeface="Arial" panose="020B0604020202020204" pitchFamily="34" charset="0"/>
+                <a:cs typeface="Arial" panose="020B0604020202020204" pitchFamily="34" charset="0"/>
+              </a:rPr>
+              <a:t> </a:t>
+            </a:r>
+            <a:r>
+              <a:rPr sz="2800" b="1" spc="15" dirty="0">
                 <a:latin typeface="Arial" panose="020B0604020202020204" pitchFamily="34" charset="0"/>
                 <a:cs typeface="Arial" panose="020B0604020202020204" pitchFamily="34" charset="0"/>
               </a:rPr>
               <a:t>mode_t</a:t>
             </a:r>
             <a:r>
-              <a:rPr sz="2400" b="1" spc="5" dirty="0">
-                <a:latin typeface="Arial" panose="020B0604020202020204" pitchFamily="34" charset="0"/>
-                <a:cs typeface="Arial" panose="020B0604020202020204" pitchFamily="34" charset="0"/>
-              </a:rPr>
-              <a:t> </a:t>
-            </a:r>
-            <a:r>
-              <a:rPr sz="2400" u="sng" spc="15" dirty="0">
+              <a:rPr sz="2800" b="1" spc="5" dirty="0">
+                <a:latin typeface="Arial" panose="020B0604020202020204" pitchFamily="34" charset="0"/>
+                <a:cs typeface="Arial" panose="020B0604020202020204" pitchFamily="34" charset="0"/>
+              </a:rPr>
+              <a:t> </a:t>
+            </a:r>
+            <a:r>
+              <a:rPr sz="2800" u="sng" spc="15" dirty="0">
                 <a:uFill>
                   <a:solidFill>
                     <a:srgbClr val="000000"/>
@@ -6154,13 +6257,13 @@
               <a:t>mode</a:t>
             </a:r>
             <a:r>
-              <a:rPr sz="2400" b="1" spc="15" dirty="0">
+              <a:rPr sz="2800" b="1" spc="15" dirty="0">
                 <a:latin typeface="Arial" panose="020B0604020202020204" pitchFamily="34" charset="0"/>
                 <a:cs typeface="Arial" panose="020B0604020202020204" pitchFamily="34" charset="0"/>
               </a:rPr>
               <a:t>);</a:t>
             </a:r>
-            <a:endParaRPr sz="2400" dirty="0">
+            <a:endParaRPr sz="2800" dirty="0">
               <a:latin typeface="Arial" panose="020B0604020202020204" pitchFamily="34" charset="0"/>
               <a:cs typeface="Arial" panose="020B0604020202020204" pitchFamily="34" charset="0"/>
             </a:endParaRPr>
@@ -6172,70 +6275,70 @@
               </a:lnSpc>
             </a:pPr>
             <a:r>
-              <a:rPr sz="2400" spc="15" dirty="0">
+              <a:rPr sz="2800" spc="15" dirty="0">
                 <a:latin typeface="Arial" panose="020B0604020202020204" pitchFamily="34" charset="0"/>
                 <a:cs typeface="Arial" panose="020B0604020202020204" pitchFamily="34" charset="0"/>
               </a:rPr>
               <a:t>creat(…)</a:t>
             </a:r>
             <a:r>
-              <a:rPr sz="2400" spc="5" dirty="0">
-                <a:latin typeface="Arial" panose="020B0604020202020204" pitchFamily="34" charset="0"/>
-                <a:cs typeface="Arial" panose="020B0604020202020204" pitchFamily="34" charset="0"/>
-              </a:rPr>
-              <a:t> </a:t>
-            </a:r>
-            <a:r>
-              <a:rPr sz="2400" spc="15" dirty="0">
+              <a:rPr sz="2800" spc="5" dirty="0">
+                <a:latin typeface="Arial" panose="020B0604020202020204" pitchFamily="34" charset="0"/>
+                <a:cs typeface="Arial" panose="020B0604020202020204" pitchFamily="34" charset="0"/>
+              </a:rPr>
+              <a:t> </a:t>
+            </a:r>
+            <a:r>
+              <a:rPr sz="2800" spc="15" dirty="0">
                 <a:latin typeface="Arial" panose="020B0604020202020204" pitchFamily="34" charset="0"/>
                 <a:cs typeface="Arial" panose="020B0604020202020204" pitchFamily="34" charset="0"/>
               </a:rPr>
               <a:t>==</a:t>
             </a:r>
             <a:r>
-              <a:rPr sz="2400" spc="5" dirty="0">
-                <a:latin typeface="Arial" panose="020B0604020202020204" pitchFamily="34" charset="0"/>
-                <a:cs typeface="Arial" panose="020B0604020202020204" pitchFamily="34" charset="0"/>
-              </a:rPr>
-              <a:t> </a:t>
-            </a:r>
-            <a:r>
-              <a:rPr sz="2400" b="1" spc="15" dirty="0">
+              <a:rPr sz="2800" spc="5" dirty="0">
+                <a:latin typeface="Arial" panose="020B0604020202020204" pitchFamily="34" charset="0"/>
+                <a:cs typeface="Arial" panose="020B0604020202020204" pitchFamily="34" charset="0"/>
+              </a:rPr>
+              <a:t> </a:t>
+            </a:r>
+            <a:r>
+              <a:rPr sz="2800" b="1" spc="15" dirty="0">
                 <a:latin typeface="Arial" panose="020B0604020202020204" pitchFamily="34" charset="0"/>
                 <a:cs typeface="Arial" panose="020B0604020202020204" pitchFamily="34" charset="0"/>
               </a:rPr>
               <a:t>open</a:t>
             </a:r>
             <a:r>
-              <a:rPr sz="2400" spc="15" dirty="0">
+              <a:rPr sz="2800" spc="15" dirty="0">
                 <a:latin typeface="Arial" panose="020B0604020202020204" pitchFamily="34" charset="0"/>
                 <a:cs typeface="Arial" panose="020B0604020202020204" pitchFamily="34" charset="0"/>
               </a:rPr>
               <a:t>(…)</a:t>
             </a:r>
             <a:r>
-              <a:rPr sz="2400" spc="10" dirty="0">
-                <a:latin typeface="Arial" panose="020B0604020202020204" pitchFamily="34" charset="0"/>
-                <a:cs typeface="Arial" panose="020B0604020202020204" pitchFamily="34" charset="0"/>
-              </a:rPr>
-              <a:t> </a:t>
-            </a:r>
-            <a:r>
-              <a:rPr sz="2400" spc="15" dirty="0">
+              <a:rPr sz="2800" spc="10" dirty="0">
+                <a:latin typeface="Arial" panose="020B0604020202020204" pitchFamily="34" charset="0"/>
+                <a:cs typeface="Arial" panose="020B0604020202020204" pitchFamily="34" charset="0"/>
+              </a:rPr>
+              <a:t> </a:t>
+            </a:r>
+            <a:r>
+              <a:rPr sz="2800" spc="15" dirty="0">
                 <a:latin typeface="Arial" panose="020B0604020202020204" pitchFamily="34" charset="0"/>
                 <a:cs typeface="Arial" panose="020B0604020202020204" pitchFamily="34" charset="0"/>
               </a:rPr>
               <a:t>with</a:t>
             </a:r>
             <a:r>
-              <a:rPr sz="2400" spc="5" dirty="0">
-                <a:latin typeface="Arial" panose="020B0604020202020204" pitchFamily="34" charset="0"/>
-                <a:cs typeface="Arial" panose="020B0604020202020204" pitchFamily="34" charset="0"/>
-              </a:rPr>
-              <a:t> </a:t>
-            </a:r>
-            <a:r>
-              <a:rPr sz="2400" u="sng" spc="15" dirty="0">
+              <a:rPr sz="2800" spc="5" dirty="0">
+                <a:latin typeface="Arial" panose="020B0604020202020204" pitchFamily="34" charset="0"/>
+                <a:cs typeface="Arial" panose="020B0604020202020204" pitchFamily="34" charset="0"/>
+              </a:rPr>
+              <a:t> </a:t>
+            </a:r>
+            <a:r>
+              <a:rPr sz="2800" u="sng" spc="15" dirty="0">
                 <a:uFill>
                   <a:solidFill>
                     <a:srgbClr val="000000"/>
@@ -6247,7 +6350,7 @@
               <a:t>flags</a:t>
             </a:r>
             <a:r>
-              <a:rPr sz="2400" u="sng" spc="10" dirty="0">
+              <a:rPr sz="2800" u="sng" spc="10" dirty="0">
                 <a:uFill>
                   <a:solidFill>
                     <a:srgbClr val="000000"/>
@@ -6259,41 +6362,41 @@
               <a:t> </a:t>
             </a:r>
             <a:r>
-              <a:rPr sz="2400" spc="15" dirty="0">
+              <a:rPr sz="2800" spc="15" dirty="0">
                 <a:latin typeface="Arial" panose="020B0604020202020204" pitchFamily="34" charset="0"/>
                 <a:cs typeface="Arial" panose="020B0604020202020204" pitchFamily="34" charset="0"/>
               </a:rPr>
               <a:t>equal</a:t>
             </a:r>
             <a:r>
-              <a:rPr sz="2400" spc="5" dirty="0">
-                <a:latin typeface="Arial" panose="020B0604020202020204" pitchFamily="34" charset="0"/>
-                <a:cs typeface="Arial" panose="020B0604020202020204" pitchFamily="34" charset="0"/>
-              </a:rPr>
-              <a:t> </a:t>
-            </a:r>
-            <a:r>
-              <a:rPr sz="2400" spc="15" dirty="0">
+              <a:rPr sz="2800" spc="5" dirty="0">
+                <a:latin typeface="Arial" panose="020B0604020202020204" pitchFamily="34" charset="0"/>
+                <a:cs typeface="Arial" panose="020B0604020202020204" pitchFamily="34" charset="0"/>
+              </a:rPr>
+              <a:t> </a:t>
+            </a:r>
+            <a:r>
+              <a:rPr sz="2800" spc="15" dirty="0">
                 <a:latin typeface="Arial" panose="020B0604020202020204" pitchFamily="34" charset="0"/>
                 <a:cs typeface="Arial" panose="020B0604020202020204" pitchFamily="34" charset="0"/>
               </a:rPr>
               <a:t>to</a:t>
             </a:r>
             <a:r>
-              <a:rPr sz="2400" spc="10" dirty="0">
-                <a:latin typeface="Arial" panose="020B0604020202020204" pitchFamily="34" charset="0"/>
-                <a:cs typeface="Arial" panose="020B0604020202020204" pitchFamily="34" charset="0"/>
-              </a:rPr>
-              <a:t> </a:t>
-            </a:r>
-            <a:r>
-              <a:rPr sz="2400" spc="15" dirty="0">
+              <a:rPr sz="2800" spc="10" dirty="0">
+                <a:latin typeface="Arial" panose="020B0604020202020204" pitchFamily="34" charset="0"/>
+                <a:cs typeface="Arial" panose="020B0604020202020204" pitchFamily="34" charset="0"/>
+              </a:rPr>
+              <a:t> </a:t>
+            </a:r>
+            <a:r>
+              <a:rPr sz="2800" spc="15" dirty="0">
                 <a:latin typeface="Arial" panose="020B0604020202020204" pitchFamily="34" charset="0"/>
                 <a:cs typeface="Arial" panose="020B0604020202020204" pitchFamily="34" charset="0"/>
               </a:rPr>
               <a:t>O_CREAT|O_WRONLY|O_TRUNC</a:t>
             </a:r>
-            <a:endParaRPr sz="2400" dirty="0">
+            <a:endParaRPr sz="2800" dirty="0">
               <a:latin typeface="Arial" panose="020B0604020202020204" pitchFamily="34" charset="0"/>
               <a:cs typeface="Arial" panose="020B0604020202020204" pitchFamily="34" charset="0"/>
             </a:endParaRPr>
@@ -6307,7 +6410,7 @@
                 <a:spcPts val="30"/>
               </a:spcBef>
             </a:pPr>
-            <a:endParaRPr sz="2400" dirty="0">
+            <a:endParaRPr sz="2800" dirty="0">
               <a:latin typeface="Arial" panose="020B0604020202020204" pitchFamily="34" charset="0"/>
               <a:cs typeface="Arial" panose="020B0604020202020204" pitchFamily="34" charset="0"/>
             </a:endParaRPr>
@@ -6319,150 +6422,167 @@
               </a:lnSpc>
             </a:pPr>
             <a:r>
-              <a:rPr sz="2400" b="1" spc="15" dirty="0">
+              <a:rPr sz="2800" b="1" spc="15" dirty="0">
                 <a:latin typeface="Arial" panose="020B0604020202020204" pitchFamily="34" charset="0"/>
                 <a:cs typeface="Arial" panose="020B0604020202020204" pitchFamily="34" charset="0"/>
               </a:rPr>
               <a:t>openat</a:t>
             </a:r>
             <a:r>
-              <a:rPr sz="2400" b="1" spc="10" dirty="0">
-                <a:latin typeface="Arial" panose="020B0604020202020204" pitchFamily="34" charset="0"/>
-                <a:cs typeface="Arial" panose="020B0604020202020204" pitchFamily="34" charset="0"/>
-              </a:rPr>
-              <a:t> </a:t>
-            </a:r>
-            <a:r>
-              <a:rPr sz="2400" spc="15" dirty="0">
+              <a:rPr sz="2800" b="1" spc="10" dirty="0">
+                <a:latin typeface="Arial" panose="020B0604020202020204" pitchFamily="34" charset="0"/>
+                <a:cs typeface="Arial" panose="020B0604020202020204" pitchFamily="34" charset="0"/>
+              </a:rPr>
+              <a:t> </a:t>
+            </a:r>
+            <a:r>
+              <a:rPr sz="2800" spc="15" dirty="0">
                 <a:latin typeface="Arial" panose="020B0604020202020204" pitchFamily="34" charset="0"/>
                 <a:cs typeface="Arial" panose="020B0604020202020204" pitchFamily="34" charset="0"/>
               </a:rPr>
               <a:t>~ </a:t>
             </a:r>
             <a:r>
-              <a:rPr sz="2400" b="1" spc="10" dirty="0">
+              <a:rPr sz="2800" b="1" spc="10" dirty="0">
                 <a:latin typeface="Arial" panose="020B0604020202020204" pitchFamily="34" charset="0"/>
                 <a:cs typeface="Arial" panose="020B0604020202020204" pitchFamily="34" charset="0"/>
               </a:rPr>
               <a:t>open</a:t>
             </a:r>
             <a:r>
-              <a:rPr sz="2400" spc="10" dirty="0">
+              <a:rPr sz="2800" spc="10" dirty="0">
                 <a:latin typeface="Arial" panose="020B0604020202020204" pitchFamily="34" charset="0"/>
                 <a:cs typeface="Arial" panose="020B0604020202020204" pitchFamily="34" charset="0"/>
               </a:rPr>
               <a:t>,</a:t>
             </a:r>
             <a:r>
-              <a:rPr sz="2400" spc="15" dirty="0">
+              <a:rPr sz="2800" spc="15" dirty="0">
                 <a:latin typeface="Arial" panose="020B0604020202020204" pitchFamily="34" charset="0"/>
                 <a:cs typeface="Arial" panose="020B0604020202020204" pitchFamily="34" charset="0"/>
               </a:rPr>
               <a:t> но если путь относительный,</a:t>
             </a:r>
             <a:r>
-              <a:rPr sz="2400" spc="10" dirty="0">
-                <a:latin typeface="Arial" panose="020B0604020202020204" pitchFamily="34" charset="0"/>
-                <a:cs typeface="Arial" panose="020B0604020202020204" pitchFamily="34" charset="0"/>
-              </a:rPr>
-              <a:t> </a:t>
-            </a:r>
-            <a:r>
-              <a:rPr sz="2400" spc="15" dirty="0">
-                <a:latin typeface="Arial" panose="020B0604020202020204" pitchFamily="34" charset="0"/>
-                <a:cs typeface="Arial" panose="020B0604020202020204" pitchFamily="34" charset="0"/>
-              </a:rPr>
-              <a:t>то он указывается относительно директории с</a:t>
-            </a:r>
-            <a:r>
-              <a:rPr sz="2400" spc="10" dirty="0">
-                <a:latin typeface="Arial" panose="020B0604020202020204" pitchFamily="34" charset="0"/>
-                <a:cs typeface="Arial" panose="020B0604020202020204" pitchFamily="34" charset="0"/>
-              </a:rPr>
-              <a:t> </a:t>
-            </a:r>
-            <a:r>
-              <a:rPr sz="2400" spc="15" dirty="0">
+              <a:rPr sz="2800" spc="10" dirty="0">
+                <a:latin typeface="Arial" panose="020B0604020202020204" pitchFamily="34" charset="0"/>
+                <a:cs typeface="Arial" panose="020B0604020202020204" pitchFamily="34" charset="0"/>
+              </a:rPr>
+              <a:t> </a:t>
+            </a:r>
+            <a:r>
+              <a:rPr sz="2800" spc="15" dirty="0">
+                <a:latin typeface="Arial" panose="020B0604020202020204" pitchFamily="34" charset="0"/>
+                <a:cs typeface="Arial" panose="020B0604020202020204" pitchFamily="34" charset="0"/>
+              </a:rPr>
+              <a:t>то он указывается относительно </a:t>
+            </a:r>
+            <a:r>
+              <a:rPr sz="2800" spc="15" dirty="0" err="1">
+                <a:latin typeface="Arial" panose="020B0604020202020204" pitchFamily="34" charset="0"/>
+                <a:cs typeface="Arial" panose="020B0604020202020204" pitchFamily="34" charset="0"/>
+              </a:rPr>
+              <a:t>директории</a:t>
+            </a:r>
+            <a:r>
+              <a:rPr sz="2800" spc="15" dirty="0">
+                <a:latin typeface="Arial" panose="020B0604020202020204" pitchFamily="34" charset="0"/>
+                <a:cs typeface="Arial" panose="020B0604020202020204" pitchFamily="34" charset="0"/>
+              </a:rPr>
+              <a:t> с</a:t>
+            </a:r>
+            <a:r>
+              <a:rPr lang="ru-RU" sz="2800" spc="10" dirty="0">
+                <a:latin typeface="Arial" panose="020B0604020202020204" pitchFamily="34" charset="0"/>
+                <a:cs typeface="Arial" panose="020B0604020202020204" pitchFamily="34" charset="0"/>
+              </a:rPr>
+              <a:t> </a:t>
+            </a:r>
+            <a:r>
+              <a:rPr sz="2800" spc="15" dirty="0" err="1">
                 <a:latin typeface="Arial" panose="020B0604020202020204" pitchFamily="34" charset="0"/>
                 <a:cs typeface="Arial" panose="020B0604020202020204" pitchFamily="34" charset="0"/>
               </a:rPr>
               <a:t>дескриптором</a:t>
             </a:r>
-            <a:endParaRPr sz="2400" dirty="0">
-              <a:latin typeface="Arial" panose="020B0604020202020204" pitchFamily="34" charset="0"/>
-              <a:cs typeface="Arial" panose="020B0604020202020204" pitchFamily="34" charset="0"/>
-            </a:endParaRPr>
-          </a:p>
-          <a:p>
-            <a:pPr marL="12700">
-              <a:lnSpc>
-                <a:spcPts val="2670"/>
-              </a:lnSpc>
-            </a:pPr>
-            <a:r>
-              <a:rPr sz="2400" spc="15" dirty="0">
-                <a:latin typeface="Arial" panose="020B0604020202020204" pitchFamily="34" charset="0"/>
-                <a:cs typeface="Arial" panose="020B0604020202020204" pitchFamily="34" charset="0"/>
-              </a:rPr>
-              <a:t>dirfd,</a:t>
-            </a:r>
-            <a:r>
-              <a:rPr sz="2400" spc="-5" dirty="0">
-                <a:latin typeface="Arial" panose="020B0604020202020204" pitchFamily="34" charset="0"/>
-                <a:cs typeface="Arial" panose="020B0604020202020204" pitchFamily="34" charset="0"/>
-              </a:rPr>
-              <a:t> </a:t>
-            </a:r>
-            <a:r>
-              <a:rPr sz="2400" spc="15" dirty="0">
+            <a:r>
+              <a:rPr lang="ru-RU" sz="2800" dirty="0">
+                <a:latin typeface="Arial" panose="020B0604020202020204" pitchFamily="34" charset="0"/>
+                <a:cs typeface="Arial" panose="020B0604020202020204" pitchFamily="34" charset="0"/>
+              </a:rPr>
+              <a:t> </a:t>
+            </a:r>
+            <a:r>
+              <a:rPr sz="2800" spc="15" dirty="0" err="1">
+                <a:latin typeface="Arial" panose="020B0604020202020204" pitchFamily="34" charset="0"/>
+                <a:cs typeface="Arial" panose="020B0604020202020204" pitchFamily="34" charset="0"/>
+              </a:rPr>
+              <a:t>dirfd</a:t>
+            </a:r>
+            <a:r>
+              <a:rPr sz="2800" spc="15" dirty="0">
+                <a:latin typeface="Arial" panose="020B0604020202020204" pitchFamily="34" charset="0"/>
+                <a:cs typeface="Arial" panose="020B0604020202020204" pitchFamily="34" charset="0"/>
+              </a:rPr>
+              <a:t>,</a:t>
+            </a:r>
+            <a:r>
+              <a:rPr sz="2800" spc="-5" dirty="0">
+                <a:latin typeface="Arial" panose="020B0604020202020204" pitchFamily="34" charset="0"/>
+                <a:cs typeface="Arial" panose="020B0604020202020204" pitchFamily="34" charset="0"/>
+              </a:rPr>
+              <a:t> </a:t>
+            </a:r>
+            <a:r>
+              <a:rPr sz="2800" spc="15" dirty="0">
                 <a:latin typeface="Arial" panose="020B0604020202020204" pitchFamily="34" charset="0"/>
                 <a:cs typeface="Arial" panose="020B0604020202020204" pitchFamily="34" charset="0"/>
               </a:rPr>
               <a:t>а</a:t>
             </a:r>
             <a:r>
-              <a:rPr sz="2400" spc="-5" dirty="0">
-                <a:latin typeface="Arial" panose="020B0604020202020204" pitchFamily="34" charset="0"/>
-                <a:cs typeface="Arial" panose="020B0604020202020204" pitchFamily="34" charset="0"/>
-              </a:rPr>
-              <a:t> </a:t>
-            </a:r>
-            <a:r>
-              <a:rPr sz="2400" spc="15" dirty="0">
+              <a:rPr sz="2800" spc="-5" dirty="0">
+                <a:latin typeface="Arial" panose="020B0604020202020204" pitchFamily="34" charset="0"/>
+                <a:cs typeface="Arial" panose="020B0604020202020204" pitchFamily="34" charset="0"/>
+              </a:rPr>
+              <a:t> </a:t>
+            </a:r>
+            <a:r>
+              <a:rPr sz="2800" spc="15" dirty="0">
                 <a:latin typeface="Arial" panose="020B0604020202020204" pitchFamily="34" charset="0"/>
                 <a:cs typeface="Arial" panose="020B0604020202020204" pitchFamily="34" charset="0"/>
               </a:rPr>
               <a:t>не</a:t>
             </a:r>
             <a:r>
-              <a:rPr sz="2400" spc="-5" dirty="0">
-                <a:latin typeface="Arial" panose="020B0604020202020204" pitchFamily="34" charset="0"/>
-                <a:cs typeface="Arial" panose="020B0604020202020204" pitchFamily="34" charset="0"/>
-              </a:rPr>
-              <a:t> </a:t>
-            </a:r>
-            <a:r>
-              <a:rPr sz="2400" spc="15" dirty="0">
+              <a:rPr sz="2800" spc="-5" dirty="0">
+                <a:latin typeface="Arial" panose="020B0604020202020204" pitchFamily="34" charset="0"/>
+                <a:cs typeface="Arial" panose="020B0604020202020204" pitchFamily="34" charset="0"/>
+              </a:rPr>
+              <a:t> </a:t>
+            </a:r>
+            <a:r>
+              <a:rPr sz="2800" spc="15" dirty="0">
                 <a:latin typeface="Arial" panose="020B0604020202020204" pitchFamily="34" charset="0"/>
                 <a:cs typeface="Arial" panose="020B0604020202020204" pitchFamily="34" charset="0"/>
               </a:rPr>
               <a:t>от</a:t>
             </a:r>
             <a:r>
-              <a:rPr sz="2400" dirty="0">
-                <a:latin typeface="Arial" panose="020B0604020202020204" pitchFamily="34" charset="0"/>
-                <a:cs typeface="Arial" panose="020B0604020202020204" pitchFamily="34" charset="0"/>
-              </a:rPr>
-              <a:t> </a:t>
-            </a:r>
-            <a:r>
-              <a:rPr sz="2400" spc="15" dirty="0">
+              <a:rPr sz="2800" dirty="0">
+                <a:latin typeface="Arial" panose="020B0604020202020204" pitchFamily="34" charset="0"/>
+                <a:cs typeface="Arial" panose="020B0604020202020204" pitchFamily="34" charset="0"/>
+              </a:rPr>
+              <a:t> </a:t>
+            </a:r>
+            <a:r>
+              <a:rPr sz="2800" spc="15" dirty="0">
                 <a:latin typeface="Arial" panose="020B0604020202020204" pitchFamily="34" charset="0"/>
                 <a:cs typeface="Arial" panose="020B0604020202020204" pitchFamily="34" charset="0"/>
               </a:rPr>
               <a:t>текущей.</a:t>
             </a:r>
-            <a:endParaRPr sz="2400" dirty="0">
+            <a:endParaRPr sz="2800" dirty="0">
               <a:latin typeface="Arial" panose="020B0604020202020204" pitchFamily="34" charset="0"/>
               <a:cs typeface="Arial" panose="020B0604020202020204" pitchFamily="34" charset="0"/>
             </a:endParaRPr>
@@ -8175,7 +8295,7 @@
         <p:spPr>
           <a:xfrm>
             <a:off x="1076272" y="3516387"/>
-            <a:ext cx="16315055" cy="2806700"/>
+            <a:ext cx="16315055" cy="2922595"/>
           </a:xfrm>
           <a:prstGeom prst="rect">
             <a:avLst/>
@@ -8196,38 +8316,38 @@
               </a:spcBef>
             </a:pPr>
             <a:r>
-              <a:rPr sz="3100" b="1" spc="25" dirty="0">
+              <a:rPr sz="3200" b="1" spc="25" dirty="0">
                 <a:solidFill>
                   <a:srgbClr val="017100"/>
                 </a:solidFill>
-                <a:latin typeface="Courier New"/>
-                <a:cs typeface="Courier New"/>
+                <a:latin typeface="Arial" panose="020B0604020202020204" pitchFamily="34" charset="0"/>
+                <a:cs typeface="Arial" panose="020B0604020202020204" pitchFamily="34" charset="0"/>
               </a:rPr>
               <a:t>#include</a:t>
             </a:r>
             <a:r>
-              <a:rPr sz="3100" b="1" spc="-35" dirty="0">
+              <a:rPr sz="3200" b="1" spc="-35" dirty="0">
                 <a:solidFill>
                   <a:srgbClr val="017100"/>
                 </a:solidFill>
-                <a:latin typeface="Courier New"/>
-                <a:cs typeface="Courier New"/>
-              </a:rPr>
-              <a:t> </a:t>
-            </a:r>
-            <a:r>
-              <a:rPr sz="3100" b="1" spc="25" dirty="0">
+                <a:latin typeface="Arial" panose="020B0604020202020204" pitchFamily="34" charset="0"/>
+                <a:cs typeface="Arial" panose="020B0604020202020204" pitchFamily="34" charset="0"/>
+              </a:rPr>
+              <a:t> </a:t>
+            </a:r>
+            <a:r>
+              <a:rPr sz="3200" b="1" spc="25" dirty="0">
                 <a:solidFill>
                   <a:srgbClr val="017100"/>
                 </a:solidFill>
-                <a:latin typeface="Courier New"/>
-                <a:cs typeface="Courier New"/>
+                <a:latin typeface="Arial" panose="020B0604020202020204" pitchFamily="34" charset="0"/>
+                <a:cs typeface="Arial" panose="020B0604020202020204" pitchFamily="34" charset="0"/>
               </a:rPr>
               <a:t>&lt;unistd.h&gt;</a:t>
             </a:r>
-            <a:endParaRPr sz="3100">
-              <a:latin typeface="Courier New"/>
-              <a:cs typeface="Courier New"/>
+            <a:endParaRPr sz="3200" dirty="0">
+              <a:latin typeface="Arial" panose="020B0604020202020204" pitchFamily="34" charset="0"/>
+              <a:cs typeface="Arial" panose="020B0604020202020204" pitchFamily="34" charset="0"/>
             </a:endParaRPr>
           </a:p>
           <a:p>
@@ -8239,9 +8359,9 @@
                 <a:spcPts val="50"/>
               </a:spcBef>
             </a:pPr>
-            <a:endParaRPr sz="3250">
-              <a:latin typeface="Courier New"/>
-              <a:cs typeface="Courier New"/>
+            <a:endParaRPr sz="3200" dirty="0">
+              <a:latin typeface="Arial" panose="020B0604020202020204" pitchFamily="34" charset="0"/>
+              <a:cs typeface="Arial" panose="020B0604020202020204" pitchFamily="34" charset="0"/>
             </a:endParaRPr>
           </a:p>
           <a:p>
@@ -8251,342 +8371,342 @@
               </a:lnSpc>
             </a:pPr>
             <a:r>
-              <a:rPr sz="3100" b="1" spc="25" dirty="0">
-                <a:latin typeface="Courier New"/>
-                <a:cs typeface="Courier New"/>
+              <a:rPr sz="3200" b="1" spc="25" dirty="0">
+                <a:latin typeface="Arial" panose="020B0604020202020204" pitchFamily="34" charset="0"/>
+                <a:cs typeface="Arial" panose="020B0604020202020204" pitchFamily="34" charset="0"/>
               </a:rPr>
               <a:t>ssize_t</a:t>
             </a:r>
             <a:r>
-              <a:rPr sz="3100" b="1" spc="35" dirty="0">
-                <a:latin typeface="Courier New"/>
-                <a:cs typeface="Courier New"/>
-              </a:rPr>
-              <a:t> </a:t>
-            </a:r>
-            <a:r>
-              <a:rPr sz="3100" b="1" spc="25" dirty="0">
-                <a:latin typeface="Courier New"/>
-                <a:cs typeface="Courier New"/>
+              <a:rPr sz="3200" b="1" spc="35" dirty="0">
+                <a:latin typeface="Arial" panose="020B0604020202020204" pitchFamily="34" charset="0"/>
+                <a:cs typeface="Arial" panose="020B0604020202020204" pitchFamily="34" charset="0"/>
+              </a:rPr>
+              <a:t> </a:t>
+            </a:r>
+            <a:r>
+              <a:rPr sz="3200" b="1" spc="25" dirty="0">
+                <a:latin typeface="Arial" panose="020B0604020202020204" pitchFamily="34" charset="0"/>
+                <a:cs typeface="Arial" panose="020B0604020202020204" pitchFamily="34" charset="0"/>
               </a:rPr>
               <a:t>pread(int</a:t>
             </a:r>
             <a:r>
-              <a:rPr sz="3100" b="1" spc="35" dirty="0">
-                <a:latin typeface="Courier New"/>
-                <a:cs typeface="Courier New"/>
-              </a:rPr>
-              <a:t> </a:t>
-            </a:r>
-            <a:r>
-              <a:rPr sz="3100" u="heavy" spc="20" dirty="0">
+              <a:rPr sz="3200" b="1" spc="35" dirty="0">
+                <a:latin typeface="Arial" panose="020B0604020202020204" pitchFamily="34" charset="0"/>
+                <a:cs typeface="Arial" panose="020B0604020202020204" pitchFamily="34" charset="0"/>
+              </a:rPr>
+              <a:t> </a:t>
+            </a:r>
+            <a:r>
+              <a:rPr sz="3200" u="heavy" spc="20" dirty="0">
                 <a:uFill>
                   <a:solidFill>
                     <a:srgbClr val="000000"/>
                   </a:solidFill>
                 </a:uFill>
-                <a:latin typeface="Courier New"/>
-                <a:cs typeface="Courier New"/>
+                <a:latin typeface="Arial" panose="020B0604020202020204" pitchFamily="34" charset="0"/>
+                <a:cs typeface="Arial" panose="020B0604020202020204" pitchFamily="34" charset="0"/>
               </a:rPr>
               <a:t>fd</a:t>
             </a:r>
             <a:r>
-              <a:rPr sz="3100" b="1" spc="20" dirty="0">
-                <a:latin typeface="Courier New"/>
-                <a:cs typeface="Courier New"/>
+              <a:rPr sz="3200" b="1" spc="20" dirty="0">
+                <a:latin typeface="Arial" panose="020B0604020202020204" pitchFamily="34" charset="0"/>
+                <a:cs typeface="Arial" panose="020B0604020202020204" pitchFamily="34" charset="0"/>
               </a:rPr>
               <a:t>,</a:t>
             </a:r>
             <a:r>
-              <a:rPr sz="3100" b="1" spc="40" dirty="0">
-                <a:latin typeface="Courier New"/>
-                <a:cs typeface="Courier New"/>
-              </a:rPr>
-              <a:t> </a:t>
-            </a:r>
-            <a:r>
-              <a:rPr sz="3100" b="1" spc="25" dirty="0">
-                <a:latin typeface="Courier New"/>
-                <a:cs typeface="Courier New"/>
+              <a:rPr sz="3200" b="1" spc="40" dirty="0">
+                <a:latin typeface="Arial" panose="020B0604020202020204" pitchFamily="34" charset="0"/>
+                <a:cs typeface="Arial" panose="020B0604020202020204" pitchFamily="34" charset="0"/>
+              </a:rPr>
+              <a:t> </a:t>
+            </a:r>
+            <a:r>
+              <a:rPr sz="3200" b="1" spc="25" dirty="0">
+                <a:latin typeface="Arial" panose="020B0604020202020204" pitchFamily="34" charset="0"/>
+                <a:cs typeface="Arial" panose="020B0604020202020204" pitchFamily="34" charset="0"/>
               </a:rPr>
               <a:t>void</a:t>
             </a:r>
             <a:r>
-              <a:rPr sz="3100" b="1" spc="40" dirty="0">
-                <a:latin typeface="Courier New"/>
-                <a:cs typeface="Courier New"/>
-              </a:rPr>
-              <a:t> </a:t>
-            </a:r>
-            <a:r>
-              <a:rPr sz="3100" b="1" spc="20" dirty="0">
-                <a:latin typeface="Courier New"/>
-                <a:cs typeface="Courier New"/>
+              <a:rPr sz="3200" b="1" spc="40" dirty="0">
+                <a:latin typeface="Arial" panose="020B0604020202020204" pitchFamily="34" charset="0"/>
+                <a:cs typeface="Arial" panose="020B0604020202020204" pitchFamily="34" charset="0"/>
+              </a:rPr>
+              <a:t> </a:t>
+            </a:r>
+            <a:r>
+              <a:rPr sz="3200" b="1" spc="20" dirty="0">
+                <a:latin typeface="Arial" panose="020B0604020202020204" pitchFamily="34" charset="0"/>
+                <a:cs typeface="Arial" panose="020B0604020202020204" pitchFamily="34" charset="0"/>
               </a:rPr>
               <a:t>*</a:t>
             </a:r>
             <a:r>
-              <a:rPr sz="3100" u="heavy" spc="20" dirty="0">
+              <a:rPr sz="3200" u="heavy" spc="20" dirty="0">
                 <a:uFill>
                   <a:solidFill>
                     <a:srgbClr val="000000"/>
                   </a:solidFill>
                 </a:uFill>
-                <a:latin typeface="Courier New"/>
-                <a:cs typeface="Courier New"/>
+                <a:latin typeface="Arial" panose="020B0604020202020204" pitchFamily="34" charset="0"/>
+                <a:cs typeface="Arial" panose="020B0604020202020204" pitchFamily="34" charset="0"/>
               </a:rPr>
               <a:t>buf</a:t>
             </a:r>
             <a:r>
-              <a:rPr sz="3100" b="1" spc="20" dirty="0">
-                <a:latin typeface="Courier New"/>
-                <a:cs typeface="Courier New"/>
+              <a:rPr sz="3200" b="1" spc="20" dirty="0">
+                <a:latin typeface="Arial" panose="020B0604020202020204" pitchFamily="34" charset="0"/>
+                <a:cs typeface="Arial" panose="020B0604020202020204" pitchFamily="34" charset="0"/>
               </a:rPr>
               <a:t>,</a:t>
             </a:r>
             <a:r>
-              <a:rPr sz="3100" b="1" spc="40" dirty="0">
-                <a:latin typeface="Courier New"/>
-                <a:cs typeface="Courier New"/>
-              </a:rPr>
-              <a:t> </a:t>
-            </a:r>
-            <a:r>
-              <a:rPr sz="3100" b="1" spc="25" dirty="0">
-                <a:latin typeface="Courier New"/>
-                <a:cs typeface="Courier New"/>
+              <a:rPr sz="3200" b="1" spc="40" dirty="0">
+                <a:latin typeface="Arial" panose="020B0604020202020204" pitchFamily="34" charset="0"/>
+                <a:cs typeface="Arial" panose="020B0604020202020204" pitchFamily="34" charset="0"/>
+              </a:rPr>
+              <a:t> </a:t>
+            </a:r>
+            <a:r>
+              <a:rPr sz="3200" b="1" spc="25" dirty="0">
+                <a:latin typeface="Arial" panose="020B0604020202020204" pitchFamily="34" charset="0"/>
+                <a:cs typeface="Arial" panose="020B0604020202020204" pitchFamily="34" charset="0"/>
               </a:rPr>
               <a:t>size_t</a:t>
             </a:r>
             <a:r>
-              <a:rPr sz="3100" b="1" spc="35" dirty="0">
-                <a:latin typeface="Courier New"/>
-                <a:cs typeface="Courier New"/>
-              </a:rPr>
-              <a:t> </a:t>
-            </a:r>
-            <a:r>
-              <a:rPr sz="3100" u="heavy" spc="25" dirty="0">
+              <a:rPr sz="3200" b="1" spc="35" dirty="0">
+                <a:latin typeface="Arial" panose="020B0604020202020204" pitchFamily="34" charset="0"/>
+                <a:cs typeface="Arial" panose="020B0604020202020204" pitchFamily="34" charset="0"/>
+              </a:rPr>
+              <a:t> </a:t>
+            </a:r>
+            <a:r>
+              <a:rPr sz="3200" u="heavy" spc="25" dirty="0">
                 <a:uFill>
                   <a:solidFill>
                     <a:srgbClr val="000000"/>
                   </a:solidFill>
                 </a:uFill>
-                <a:latin typeface="Courier New"/>
-                <a:cs typeface="Courier New"/>
+                <a:latin typeface="Arial" panose="020B0604020202020204" pitchFamily="34" charset="0"/>
+                <a:cs typeface="Arial" panose="020B0604020202020204" pitchFamily="34" charset="0"/>
               </a:rPr>
               <a:t>count</a:t>
             </a:r>
             <a:r>
-              <a:rPr sz="3100" b="1" spc="25" dirty="0">
-                <a:latin typeface="Courier New"/>
-                <a:cs typeface="Courier New"/>
+              <a:rPr sz="3200" b="1" spc="25" dirty="0">
+                <a:latin typeface="Arial" panose="020B0604020202020204" pitchFamily="34" charset="0"/>
+                <a:cs typeface="Arial" panose="020B0604020202020204" pitchFamily="34" charset="0"/>
               </a:rPr>
               <a:t>,</a:t>
             </a:r>
             <a:r>
-              <a:rPr sz="3100" b="1" spc="40" dirty="0">
-                <a:latin typeface="Courier New"/>
-                <a:cs typeface="Courier New"/>
-              </a:rPr>
-              <a:t> </a:t>
-            </a:r>
-            <a:r>
-              <a:rPr sz="3100" b="1" spc="25" dirty="0">
-                <a:latin typeface="Courier New"/>
-                <a:cs typeface="Courier New"/>
+              <a:rPr sz="3200" b="1" spc="40" dirty="0">
+                <a:latin typeface="Arial" panose="020B0604020202020204" pitchFamily="34" charset="0"/>
+                <a:cs typeface="Arial" panose="020B0604020202020204" pitchFamily="34" charset="0"/>
+              </a:rPr>
+              <a:t> </a:t>
+            </a:r>
+            <a:r>
+              <a:rPr sz="3200" b="1" spc="25" dirty="0">
+                <a:latin typeface="Arial" panose="020B0604020202020204" pitchFamily="34" charset="0"/>
+                <a:cs typeface="Arial" panose="020B0604020202020204" pitchFamily="34" charset="0"/>
               </a:rPr>
               <a:t>off_t</a:t>
             </a:r>
             <a:r>
-              <a:rPr sz="3100" b="1" spc="40" dirty="0">
-                <a:latin typeface="Courier New"/>
-                <a:cs typeface="Courier New"/>
-              </a:rPr>
-              <a:t> </a:t>
-            </a:r>
-            <a:r>
-              <a:rPr sz="3100" u="heavy" spc="25" dirty="0">
+              <a:rPr sz="3200" b="1" spc="40" dirty="0">
+                <a:latin typeface="Arial" panose="020B0604020202020204" pitchFamily="34" charset="0"/>
+                <a:cs typeface="Arial" panose="020B0604020202020204" pitchFamily="34" charset="0"/>
+              </a:rPr>
+              <a:t> </a:t>
+            </a:r>
+            <a:r>
+              <a:rPr sz="3200" u="heavy" spc="25" dirty="0">
                 <a:uFill>
                   <a:solidFill>
                     <a:srgbClr val="000000"/>
                   </a:solidFill>
                 </a:uFill>
-                <a:latin typeface="Courier New"/>
-                <a:cs typeface="Courier New"/>
+                <a:latin typeface="Arial" panose="020B0604020202020204" pitchFamily="34" charset="0"/>
+                <a:cs typeface="Arial" panose="020B0604020202020204" pitchFamily="34" charset="0"/>
               </a:rPr>
               <a:t>offset</a:t>
             </a:r>
             <a:r>
-              <a:rPr sz="3100" b="1" spc="25" dirty="0">
-                <a:latin typeface="Courier New"/>
-                <a:cs typeface="Courier New"/>
+              <a:rPr sz="3200" b="1" spc="25" dirty="0">
+                <a:latin typeface="Arial" panose="020B0604020202020204" pitchFamily="34" charset="0"/>
+                <a:cs typeface="Arial" panose="020B0604020202020204" pitchFamily="34" charset="0"/>
               </a:rPr>
               <a:t>); </a:t>
             </a:r>
             <a:r>
-              <a:rPr sz="3100" b="1" spc="30" dirty="0">
-                <a:latin typeface="Courier New"/>
-                <a:cs typeface="Courier New"/>
-              </a:rPr>
-              <a:t> </a:t>
-            </a:r>
-            <a:r>
-              <a:rPr sz="3100" b="1" spc="25" dirty="0">
-                <a:latin typeface="Courier New"/>
-                <a:cs typeface="Courier New"/>
+              <a:rPr sz="3200" b="1" spc="30" dirty="0">
+                <a:latin typeface="Arial" panose="020B0604020202020204" pitchFamily="34" charset="0"/>
+                <a:cs typeface="Arial" panose="020B0604020202020204" pitchFamily="34" charset="0"/>
+              </a:rPr>
+              <a:t> </a:t>
+            </a:r>
+            <a:r>
+              <a:rPr sz="3200" b="1" spc="25" dirty="0">
+                <a:latin typeface="Arial" panose="020B0604020202020204" pitchFamily="34" charset="0"/>
+                <a:cs typeface="Arial" panose="020B0604020202020204" pitchFamily="34" charset="0"/>
               </a:rPr>
               <a:t>ssize_t</a:t>
             </a:r>
             <a:r>
-              <a:rPr sz="3100" b="1" spc="20" dirty="0">
-                <a:latin typeface="Courier New"/>
-                <a:cs typeface="Courier New"/>
-              </a:rPr>
-              <a:t> </a:t>
-            </a:r>
-            <a:r>
-              <a:rPr sz="3100" b="1" spc="25" dirty="0">
-                <a:latin typeface="Courier New"/>
-                <a:cs typeface="Courier New"/>
+              <a:rPr sz="3200" b="1" spc="20" dirty="0">
+                <a:latin typeface="Arial" panose="020B0604020202020204" pitchFamily="34" charset="0"/>
+                <a:cs typeface="Arial" panose="020B0604020202020204" pitchFamily="34" charset="0"/>
+              </a:rPr>
+              <a:t> </a:t>
+            </a:r>
+            <a:r>
+              <a:rPr sz="3200" b="1" spc="25" dirty="0">
+                <a:latin typeface="Arial" panose="020B0604020202020204" pitchFamily="34" charset="0"/>
+                <a:cs typeface="Arial" panose="020B0604020202020204" pitchFamily="34" charset="0"/>
               </a:rPr>
               <a:t>pwrite(int</a:t>
             </a:r>
             <a:r>
-              <a:rPr sz="3100" b="1" spc="15" dirty="0">
-                <a:latin typeface="Courier New"/>
-                <a:cs typeface="Courier New"/>
-              </a:rPr>
-              <a:t> </a:t>
-            </a:r>
-            <a:r>
-              <a:rPr sz="3100" u="heavy" spc="20" dirty="0">
+              <a:rPr sz="3200" b="1" spc="15" dirty="0">
+                <a:latin typeface="Arial" panose="020B0604020202020204" pitchFamily="34" charset="0"/>
+                <a:cs typeface="Arial" panose="020B0604020202020204" pitchFamily="34" charset="0"/>
+              </a:rPr>
+              <a:t> </a:t>
+            </a:r>
+            <a:r>
+              <a:rPr sz="3200" u="heavy" spc="20" dirty="0">
                 <a:uFill>
                   <a:solidFill>
                     <a:srgbClr val="000000"/>
                   </a:solidFill>
                 </a:uFill>
-                <a:latin typeface="Courier New"/>
-                <a:cs typeface="Courier New"/>
+                <a:latin typeface="Arial" panose="020B0604020202020204" pitchFamily="34" charset="0"/>
+                <a:cs typeface="Arial" panose="020B0604020202020204" pitchFamily="34" charset="0"/>
               </a:rPr>
               <a:t>fd</a:t>
             </a:r>
             <a:r>
-              <a:rPr sz="3100" b="1" spc="20" dirty="0">
-                <a:latin typeface="Courier New"/>
-                <a:cs typeface="Courier New"/>
+              <a:rPr sz="3200" b="1" spc="20" dirty="0">
+                <a:latin typeface="Arial" panose="020B0604020202020204" pitchFamily="34" charset="0"/>
+                <a:cs typeface="Arial" panose="020B0604020202020204" pitchFamily="34" charset="0"/>
               </a:rPr>
               <a:t>,</a:t>
             </a:r>
             <a:r>
-              <a:rPr sz="3100" b="1" spc="25" dirty="0">
-                <a:latin typeface="Courier New"/>
-                <a:cs typeface="Courier New"/>
+              <a:rPr sz="3200" b="1" spc="25" dirty="0">
+                <a:latin typeface="Arial" panose="020B0604020202020204" pitchFamily="34" charset="0"/>
+                <a:cs typeface="Arial" panose="020B0604020202020204" pitchFamily="34" charset="0"/>
               </a:rPr>
               <a:t> const</a:t>
             </a:r>
             <a:r>
-              <a:rPr sz="3100" b="1" spc="20" dirty="0">
-                <a:latin typeface="Courier New"/>
-                <a:cs typeface="Courier New"/>
-              </a:rPr>
-              <a:t> </a:t>
-            </a:r>
-            <a:r>
-              <a:rPr sz="3100" b="1" spc="25" dirty="0">
-                <a:latin typeface="Courier New"/>
-                <a:cs typeface="Courier New"/>
+              <a:rPr sz="3200" b="1" spc="20" dirty="0">
+                <a:latin typeface="Arial" panose="020B0604020202020204" pitchFamily="34" charset="0"/>
+                <a:cs typeface="Arial" panose="020B0604020202020204" pitchFamily="34" charset="0"/>
+              </a:rPr>
+              <a:t> </a:t>
+            </a:r>
+            <a:r>
+              <a:rPr sz="3200" b="1" spc="25" dirty="0">
+                <a:latin typeface="Arial" panose="020B0604020202020204" pitchFamily="34" charset="0"/>
+                <a:cs typeface="Arial" panose="020B0604020202020204" pitchFamily="34" charset="0"/>
               </a:rPr>
               <a:t>void </a:t>
             </a:r>
             <a:r>
-              <a:rPr sz="3100" b="1" spc="20" dirty="0">
-                <a:latin typeface="Courier New"/>
-                <a:cs typeface="Courier New"/>
+              <a:rPr sz="3200" b="1" spc="20" dirty="0">
+                <a:latin typeface="Arial" panose="020B0604020202020204" pitchFamily="34" charset="0"/>
+                <a:cs typeface="Arial" panose="020B0604020202020204" pitchFamily="34" charset="0"/>
               </a:rPr>
               <a:t>*</a:t>
             </a:r>
             <a:r>
-              <a:rPr sz="3100" u="heavy" spc="20" dirty="0">
+              <a:rPr sz="3200" u="heavy" spc="20" dirty="0">
                 <a:uFill>
                   <a:solidFill>
                     <a:srgbClr val="000000"/>
                   </a:solidFill>
                 </a:uFill>
-                <a:latin typeface="Courier New"/>
-                <a:cs typeface="Courier New"/>
+                <a:latin typeface="Arial" panose="020B0604020202020204" pitchFamily="34" charset="0"/>
+                <a:cs typeface="Arial" panose="020B0604020202020204" pitchFamily="34" charset="0"/>
               </a:rPr>
               <a:t>buf</a:t>
             </a:r>
             <a:r>
-              <a:rPr sz="3100" b="1" spc="20" dirty="0">
-                <a:latin typeface="Courier New"/>
-                <a:cs typeface="Courier New"/>
+              <a:rPr sz="3200" b="1" spc="20" dirty="0">
+                <a:latin typeface="Arial" panose="020B0604020202020204" pitchFamily="34" charset="0"/>
+                <a:cs typeface="Arial" panose="020B0604020202020204" pitchFamily="34" charset="0"/>
               </a:rPr>
               <a:t>, </a:t>
             </a:r>
             <a:r>
-              <a:rPr sz="3100" b="1" spc="25" dirty="0">
-                <a:latin typeface="Courier New"/>
-                <a:cs typeface="Courier New"/>
+              <a:rPr sz="3200" b="1" spc="25" dirty="0">
+                <a:latin typeface="Arial" panose="020B0604020202020204" pitchFamily="34" charset="0"/>
+                <a:cs typeface="Arial" panose="020B0604020202020204" pitchFamily="34" charset="0"/>
               </a:rPr>
               <a:t>size_t </a:t>
             </a:r>
             <a:r>
-              <a:rPr sz="3100" u="heavy" spc="25" dirty="0">
+              <a:rPr sz="3200" u="heavy" spc="25" dirty="0">
                 <a:uFill>
                   <a:solidFill>
                     <a:srgbClr val="000000"/>
                   </a:solidFill>
                 </a:uFill>
-                <a:latin typeface="Courier New"/>
-                <a:cs typeface="Courier New"/>
+                <a:latin typeface="Arial" panose="020B0604020202020204" pitchFamily="34" charset="0"/>
+                <a:cs typeface="Arial" panose="020B0604020202020204" pitchFamily="34" charset="0"/>
               </a:rPr>
               <a:t>count</a:t>
             </a:r>
             <a:r>
-              <a:rPr sz="3100" b="1" spc="25" dirty="0">
-                <a:latin typeface="Courier New"/>
-                <a:cs typeface="Courier New"/>
+              <a:rPr sz="3200" b="1" spc="25" dirty="0">
+                <a:latin typeface="Arial" panose="020B0604020202020204" pitchFamily="34" charset="0"/>
+                <a:cs typeface="Arial" panose="020B0604020202020204" pitchFamily="34" charset="0"/>
               </a:rPr>
               <a:t>,</a:t>
             </a:r>
             <a:r>
-              <a:rPr sz="3100" b="1" spc="20" dirty="0">
-                <a:latin typeface="Courier New"/>
-                <a:cs typeface="Courier New"/>
-              </a:rPr>
-              <a:t> </a:t>
-            </a:r>
-            <a:r>
-              <a:rPr sz="3100" b="1" spc="25" dirty="0">
-                <a:latin typeface="Courier New"/>
-                <a:cs typeface="Courier New"/>
+              <a:rPr sz="3200" b="1" spc="20" dirty="0">
+                <a:latin typeface="Arial" panose="020B0604020202020204" pitchFamily="34" charset="0"/>
+                <a:cs typeface="Arial" panose="020B0604020202020204" pitchFamily="34" charset="0"/>
+              </a:rPr>
+              <a:t> </a:t>
+            </a:r>
+            <a:r>
+              <a:rPr sz="3200" b="1" spc="25" dirty="0">
+                <a:latin typeface="Arial" panose="020B0604020202020204" pitchFamily="34" charset="0"/>
+                <a:cs typeface="Arial" panose="020B0604020202020204" pitchFamily="34" charset="0"/>
               </a:rPr>
               <a:t>off_t </a:t>
             </a:r>
             <a:r>
-              <a:rPr sz="3100" u="heavy" spc="25" dirty="0">
+              <a:rPr sz="3200" u="heavy" spc="25" dirty="0">
                 <a:uFill>
                   <a:solidFill>
                     <a:srgbClr val="000000"/>
                   </a:solidFill>
                 </a:uFill>
-                <a:latin typeface="Courier New"/>
-                <a:cs typeface="Courier New"/>
+                <a:latin typeface="Arial" panose="020B0604020202020204" pitchFamily="34" charset="0"/>
+                <a:cs typeface="Arial" panose="020B0604020202020204" pitchFamily="34" charset="0"/>
               </a:rPr>
               <a:t>offset</a:t>
             </a:r>
             <a:r>
-              <a:rPr sz="3100" b="1" spc="25" dirty="0">
-                <a:latin typeface="Courier New"/>
-                <a:cs typeface="Courier New"/>
+              <a:rPr sz="3200" b="1" spc="25" dirty="0">
+                <a:latin typeface="Arial" panose="020B0604020202020204" pitchFamily="34" charset="0"/>
+                <a:cs typeface="Arial" panose="020B0604020202020204" pitchFamily="34" charset="0"/>
               </a:rPr>
               <a:t>);</a:t>
             </a:r>
-            <a:endParaRPr sz="3100">
-              <a:latin typeface="Courier New"/>
-              <a:cs typeface="Courier New"/>
+            <a:endParaRPr sz="3200" dirty="0">
+              <a:latin typeface="Arial" panose="020B0604020202020204" pitchFamily="34" charset="0"/>
+              <a:cs typeface="Arial" panose="020B0604020202020204" pitchFamily="34" charset="0"/>
             </a:endParaRPr>
           </a:p>
           <a:p>
@@ -8598,9 +8718,9 @@
                 <a:spcPts val="30"/>
               </a:spcBef>
             </a:pPr>
-            <a:endParaRPr sz="3000">
-              <a:latin typeface="Courier New"/>
-              <a:cs typeface="Courier New"/>
+            <a:endParaRPr sz="3200" dirty="0">
+              <a:latin typeface="Arial" panose="020B0604020202020204" pitchFamily="34" charset="0"/>
+              <a:cs typeface="Arial" panose="020B0604020202020204" pitchFamily="34" charset="0"/>
             </a:endParaRPr>
           </a:p>
           <a:p>
@@ -8610,99 +8730,113 @@
               </a:lnSpc>
             </a:pPr>
             <a:r>
-              <a:rPr sz="3100" spc="25" dirty="0">
-                <a:latin typeface="Courier New"/>
-                <a:cs typeface="Courier New"/>
+              <a:rPr sz="3200" spc="25" dirty="0">
+                <a:latin typeface="Arial" panose="020B0604020202020204" pitchFamily="34" charset="0"/>
+                <a:cs typeface="Arial" panose="020B0604020202020204" pitchFamily="34" charset="0"/>
               </a:rPr>
               <a:t>То</a:t>
             </a:r>
             <a:r>
-              <a:rPr sz="3100" spc="10" dirty="0">
-                <a:latin typeface="Courier New"/>
-                <a:cs typeface="Courier New"/>
-              </a:rPr>
-              <a:t> </a:t>
-            </a:r>
-            <a:r>
-              <a:rPr sz="3100" spc="25" dirty="0">
-                <a:latin typeface="Courier New"/>
-                <a:cs typeface="Courier New"/>
+              <a:rPr sz="3200" spc="10" dirty="0">
+                <a:latin typeface="Arial" panose="020B0604020202020204" pitchFamily="34" charset="0"/>
+                <a:cs typeface="Arial" panose="020B0604020202020204" pitchFamily="34" charset="0"/>
+              </a:rPr>
+              <a:t> </a:t>
+            </a:r>
+            <a:r>
+              <a:rPr sz="3200" spc="25" dirty="0">
+                <a:latin typeface="Arial" panose="020B0604020202020204" pitchFamily="34" charset="0"/>
+                <a:cs typeface="Arial" panose="020B0604020202020204" pitchFamily="34" charset="0"/>
               </a:rPr>
               <a:t>же</a:t>
             </a:r>
             <a:r>
-              <a:rPr sz="3100" spc="15" dirty="0">
-                <a:latin typeface="Courier New"/>
-                <a:cs typeface="Courier New"/>
-              </a:rPr>
-              <a:t> </a:t>
-            </a:r>
-            <a:r>
-              <a:rPr sz="3100" spc="25" dirty="0">
-                <a:latin typeface="Courier New"/>
-                <a:cs typeface="Courier New"/>
+              <a:rPr sz="3200" spc="15" dirty="0">
+                <a:latin typeface="Arial" panose="020B0604020202020204" pitchFamily="34" charset="0"/>
+                <a:cs typeface="Arial" panose="020B0604020202020204" pitchFamily="34" charset="0"/>
+              </a:rPr>
+              <a:t> </a:t>
+            </a:r>
+            <a:r>
+              <a:rPr sz="3200" spc="25" dirty="0">
+                <a:latin typeface="Arial" panose="020B0604020202020204" pitchFamily="34" charset="0"/>
+                <a:cs typeface="Arial" panose="020B0604020202020204" pitchFamily="34" charset="0"/>
               </a:rPr>
               <a:t>самое,</a:t>
             </a:r>
             <a:r>
-              <a:rPr sz="3100" spc="15" dirty="0">
-                <a:latin typeface="Courier New"/>
-                <a:cs typeface="Courier New"/>
-              </a:rPr>
-              <a:t> </a:t>
-            </a:r>
-            <a:r>
-              <a:rPr sz="3100" spc="25" dirty="0">
-                <a:latin typeface="Courier New"/>
-                <a:cs typeface="Courier New"/>
+              <a:rPr sz="3200" spc="15" dirty="0">
+                <a:latin typeface="Arial" panose="020B0604020202020204" pitchFamily="34" charset="0"/>
+                <a:cs typeface="Arial" panose="020B0604020202020204" pitchFamily="34" charset="0"/>
+              </a:rPr>
+              <a:t> </a:t>
+            </a:r>
+            <a:r>
+              <a:rPr sz="3200" spc="25" dirty="0">
+                <a:latin typeface="Arial" panose="020B0604020202020204" pitchFamily="34" charset="0"/>
+                <a:cs typeface="Arial" panose="020B0604020202020204" pitchFamily="34" charset="0"/>
               </a:rPr>
               <a:t>но</a:t>
             </a:r>
             <a:r>
-              <a:rPr sz="3100" spc="10" dirty="0">
-                <a:latin typeface="Courier New"/>
-                <a:cs typeface="Courier New"/>
-              </a:rPr>
-              <a:t> </a:t>
-            </a:r>
-            <a:r>
-              <a:rPr sz="3100" spc="25" dirty="0">
-                <a:latin typeface="Courier New"/>
-                <a:cs typeface="Courier New"/>
+              <a:rPr sz="3200" spc="10" dirty="0">
+                <a:latin typeface="Arial" panose="020B0604020202020204" pitchFamily="34" charset="0"/>
+                <a:cs typeface="Arial" panose="020B0604020202020204" pitchFamily="34" charset="0"/>
+              </a:rPr>
+              <a:t> </a:t>
+            </a:r>
+            <a:r>
+              <a:rPr sz="3200" spc="25" dirty="0">
+                <a:latin typeface="Arial" panose="020B0604020202020204" pitchFamily="34" charset="0"/>
+                <a:cs typeface="Arial" panose="020B0604020202020204" pitchFamily="34" charset="0"/>
               </a:rPr>
               <a:t>с</a:t>
             </a:r>
             <a:r>
-              <a:rPr sz="3100" spc="15" dirty="0">
-                <a:latin typeface="Courier New"/>
-                <a:cs typeface="Courier New"/>
-              </a:rPr>
-              <a:t> </a:t>
-            </a:r>
-            <a:r>
-              <a:rPr sz="3100" spc="25" dirty="0">
-                <a:latin typeface="Courier New"/>
-                <a:cs typeface="Courier New"/>
+              <a:rPr sz="3200" spc="15" dirty="0">
+                <a:latin typeface="Arial" panose="020B0604020202020204" pitchFamily="34" charset="0"/>
+                <a:cs typeface="Arial" panose="020B0604020202020204" pitchFamily="34" charset="0"/>
+              </a:rPr>
+              <a:t> </a:t>
+            </a:r>
+            <a:r>
+              <a:rPr sz="3200" spc="25" dirty="0" err="1">
+                <a:latin typeface="Arial" panose="020B0604020202020204" pitchFamily="34" charset="0"/>
+                <a:cs typeface="Arial" panose="020B0604020202020204" pitchFamily="34" charset="0"/>
               </a:rPr>
               <a:t>указанием</a:t>
             </a:r>
             <a:r>
-              <a:rPr sz="3100" spc="15" dirty="0">
-                <a:latin typeface="Courier New"/>
-                <a:cs typeface="Courier New"/>
-              </a:rPr>
-              <a:t> </a:t>
-            </a:r>
-            <a:r>
-              <a:rPr sz="3100" spc="25" dirty="0">
-                <a:latin typeface="Courier New"/>
-                <a:cs typeface="Courier New"/>
+              <a:rPr sz="3200" spc="15" dirty="0">
+                <a:latin typeface="Arial" panose="020B0604020202020204" pitchFamily="34" charset="0"/>
+                <a:cs typeface="Arial" panose="020B0604020202020204" pitchFamily="34" charset="0"/>
+              </a:rPr>
+              <a:t> </a:t>
+            </a:r>
+            <a:r>
+              <a:rPr sz="3200" spc="25" dirty="0">
+                <a:latin typeface="Arial" panose="020B0604020202020204" pitchFamily="34" charset="0"/>
+                <a:cs typeface="Arial" panose="020B0604020202020204" pitchFamily="34" charset="0"/>
               </a:rPr>
               <a:t>offset</a:t>
             </a:r>
-            <a:endParaRPr sz="3100">
-              <a:latin typeface="Courier New"/>
-              <a:cs typeface="Courier New"/>
+            <a:r>
+              <a:rPr lang="en-US" sz="3200" spc="25" dirty="0">
+                <a:latin typeface="Arial" panose="020B0604020202020204" pitchFamily="34" charset="0"/>
+                <a:cs typeface="Arial" panose="020B0604020202020204" pitchFamily="34" charset="0"/>
+              </a:rPr>
+              <a:t>. Offset </a:t>
+            </a:r>
+            <a:r>
+              <a:rPr lang="ru-RU" sz="3200" spc="25" dirty="0">
+                <a:latin typeface="Arial" panose="020B0604020202020204" pitchFamily="34" charset="0"/>
+                <a:cs typeface="Arial" panose="020B0604020202020204" pitchFamily="34" charset="0"/>
+              </a:rPr>
+              <a:t>не меняется</a:t>
+            </a:r>
+            <a:endParaRPr sz="3200" dirty="0">
+              <a:latin typeface="Arial" panose="020B0604020202020204" pitchFamily="34" charset="0"/>
+              <a:cs typeface="Arial" panose="020B0604020202020204" pitchFamily="34" charset="0"/>
             </a:endParaRPr>
           </a:p>
         </p:txBody>
@@ -9840,7 +9974,7 @@
               </a:rPr>
               <a:t>};</a:t>
             </a:r>
-            <a:endParaRPr sz="2600">
+            <a:endParaRPr sz="2600" dirty="0">
               <a:latin typeface="Courier New"/>
               <a:cs typeface="Courier New"/>
             </a:endParaRPr>
@@ -11254,7 +11388,7 @@
         <p:spPr>
           <a:xfrm>
             <a:off x="1076272" y="3278514"/>
-            <a:ext cx="17281578" cy="1888979"/>
+            <a:ext cx="17281578" cy="3104696"/>
           </a:xfrm>
           <a:prstGeom prst="rect">
             <a:avLst/>
@@ -11392,6 +11526,27 @@
               </a:rPr>
               <a:t>link)</a:t>
             </a:r>
+            <a:r>
+              <a:rPr lang="en-US" sz="3950" spc="80" dirty="0">
+                <a:latin typeface="Arial" panose="020B0604020202020204" pitchFamily="34" charset="0"/>
+                <a:cs typeface="Arial" panose="020B0604020202020204" pitchFamily="34" charset="0"/>
+              </a:rPr>
+              <a:t> (</a:t>
+            </a:r>
+            <a:r>
+              <a:rPr lang="ru-RU" sz="3950" spc="80" dirty="0">
+                <a:latin typeface="Arial" panose="020B0604020202020204" pitchFamily="34" charset="0"/>
+                <a:cs typeface="Arial" panose="020B0604020202020204" pitchFamily="34" charset="0"/>
+              </a:rPr>
+              <a:t>другое имя файла</a:t>
+            </a:r>
+            <a:r>
+              <a:rPr lang="en-US" sz="3950" spc="80" dirty="0">
+                <a:latin typeface="Arial" panose="020B0604020202020204" pitchFamily="34" charset="0"/>
+                <a:cs typeface="Arial" panose="020B0604020202020204" pitchFamily="34" charset="0"/>
+              </a:rPr>
+              <a:t>)</a:t>
+            </a:r>
             <a:endParaRPr sz="3950" dirty="0">
               <a:latin typeface="Arial" panose="020B0604020202020204" pitchFamily="34" charset="0"/>
               <a:cs typeface="Arial" panose="020B0604020202020204" pitchFamily="34" charset="0"/>
@@ -11536,6 +11691,13 @@
                 <a:cs typeface="Arial" panose="020B0604020202020204" pitchFamily="34" charset="0"/>
               </a:rPr>
               <a:t>link)</a:t>
+            </a:r>
+            <a:r>
+              <a:rPr lang="ru-RU" sz="3950" spc="80" dirty="0">
+                <a:latin typeface="Arial" panose="020B0604020202020204" pitchFamily="34" charset="0"/>
+                <a:cs typeface="Arial" panose="020B0604020202020204" pitchFamily="34" charset="0"/>
+              </a:rPr>
+              <a:t> (привязана к пути до файла)</a:t>
             </a:r>
             <a:endParaRPr sz="3950" dirty="0">
               <a:latin typeface="Arial" panose="020B0604020202020204" pitchFamily="34" charset="0"/>
@@ -12634,11 +12796,39 @@
               <a:t> </a:t>
             </a:r>
             <a:r>
+              <a:rPr sz="2800" spc="5" dirty="0" err="1">
+                <a:latin typeface="Arial" panose="020B0604020202020204" pitchFamily="34" charset="0"/>
+                <a:cs typeface="Arial" panose="020B0604020202020204" pitchFamily="34" charset="0"/>
+              </a:rPr>
+              <a:t>не</a:t>
+            </a:r>
+            <a:r>
               <a:rPr sz="2800" spc="5" dirty="0">
                 <a:latin typeface="Arial" panose="020B0604020202020204" pitchFamily="34" charset="0"/>
                 <a:cs typeface="Arial" panose="020B0604020202020204" pitchFamily="34" charset="0"/>
               </a:rPr>
-              <a:t>не о файле, на который указывает ссылка.</a:t>
+              <a:t> о</a:t>
+            </a:r>
+            <a:r>
+              <a:rPr lang="ru-RU" sz="2800" spc="5" dirty="0">
+                <a:latin typeface="Arial" panose="020B0604020202020204" pitchFamily="34" charset="0"/>
+                <a:cs typeface="Arial" panose="020B0604020202020204" pitchFamily="34" charset="0"/>
+              </a:rPr>
+              <a:t> </a:t>
+            </a:r>
+            <a:r>
+              <a:rPr sz="2800" spc="5" dirty="0" err="1">
+                <a:latin typeface="Arial" panose="020B0604020202020204" pitchFamily="34" charset="0"/>
+                <a:cs typeface="Arial" panose="020B0604020202020204" pitchFamily="34" charset="0"/>
+              </a:rPr>
+              <a:t>файле</a:t>
+            </a:r>
+            <a:r>
+              <a:rPr sz="2800" spc="5" dirty="0">
+                <a:latin typeface="Arial" panose="020B0604020202020204" pitchFamily="34" charset="0"/>
+                <a:cs typeface="Arial" panose="020B0604020202020204" pitchFamily="34" charset="0"/>
+              </a:rPr>
+              <a:t>, на который указывает ссылка.</a:t>
             </a:r>
             <a:endParaRPr sz="2800" dirty="0">
               <a:latin typeface="Arial" panose="020B0604020202020204" pitchFamily="34" charset="0"/>
@@ -12925,23 +13115,26 @@
               <a:t> </a:t>
             </a:r>
             <a:r>
+              <a:rPr sz="2800" spc="5" dirty="0" err="1">
+                <a:latin typeface="Arial" panose="020B0604020202020204" pitchFamily="34" charset="0"/>
+                <a:cs typeface="Arial" panose="020B0604020202020204" pitchFamily="34" charset="0"/>
+              </a:rPr>
+              <a:t>fd</a:t>
+            </a:r>
+            <a:r>
               <a:rPr sz="2800" spc="5" dirty="0">
                 <a:latin typeface="Arial" panose="020B0604020202020204" pitchFamily="34" charset="0"/>
                 <a:cs typeface="Arial" panose="020B0604020202020204" pitchFamily="34" charset="0"/>
               </a:rPr>
-              <a:t>fd,</a:t>
-            </a:r>
-            <a:endParaRPr sz="2800" dirty="0">
-              <a:latin typeface="Arial" panose="020B0604020202020204" pitchFamily="34" charset="0"/>
-              <a:cs typeface="Arial" panose="020B0604020202020204" pitchFamily="34" charset="0"/>
-            </a:endParaRPr>
-          </a:p>
-          <a:p>
-            <a:pPr marL="12700">
-              <a:lnSpc>
-                <a:spcPts val="2945"/>
-              </a:lnSpc>
-            </a:pPr>
+              <a:t>,</a:t>
+            </a:r>
+            <a:r>
+              <a:rPr lang="ru-RU" sz="2800" dirty="0">
+                <a:latin typeface="Arial" panose="020B0604020202020204" pitchFamily="34" charset="0"/>
+                <a:cs typeface="Arial" panose="020B0604020202020204" pitchFamily="34" charset="0"/>
+              </a:rPr>
+              <a:t> </a:t>
+            </a:r>
             <a:r>
               <a:rPr sz="2800" spc="5" dirty="0">
                 <a:latin typeface="Arial" panose="020B0604020202020204" pitchFamily="34" charset="0"/>
